--- a/slides/demo7-intro-slides.pptx
+++ b/slides/demo7-intro-slides.pptx
@@ -25,6 +25,8 @@
     <p:sldId id="273" r:id="rId19"/>
     <p:sldId id="274" r:id="rId20"/>
     <p:sldId id="275" r:id="rId21"/>
+    <p:sldId id="276" r:id="rId22"/>
+    <p:sldId id="277" r:id="rId23"/>
   </p:sldIdLst>
   <p:sldSz cx="9144000" cy="5143500" type="screen16x9"/>
   <p:notesSz cx="6858000" cy="9144000"/>
@@ -3224,6 +3226,173 @@
       </p:grpSpPr>
       <p:sp>
         <p:nvSpPr>
+          <p:cNvPr id="3" name="Content Placeholder 2"/>
+          <p:cNvSpPr>
+            <a:spLocks noGrp="1"/>
+          </p:cNvSpPr>
+          <p:nvPr>
+            <p:ph idx="1" sz="half"/>
+          </p:nvPr>
+        </p:nvSpPr>
+        <p:spPr/>
+        <p:txBody>
+          <a:bodyPr/>
+          <a:lstStyle/>
+          <a:p>
+            <a:pPr lvl="0" indent="0" marL="0">
+              <a:buNone/>
+            </a:pPr>
+            <a:r>
+              <a:rPr b="1"/>
+              <a:t>Strong signal</a:t>
+            </a:r>
+          </a:p>
+          <a:p>
+            <a:pPr lvl="0" indent="0" marL="0">
+              <a:buNone/>
+            </a:pPr>
+            <a:r>
+              <a:rPr/>
+              <a:t>Relatives look alike → color patterns evolve slowly</a:t>
+            </a:r>
+          </a:p>
+          <a:p>
+            <a:pPr lvl="0" indent="0" marL="0">
+              <a:buNone/>
+            </a:pPr>
+            <a:r>
+              <a:rPr i="1"/>
+              <a:t>Pattern is “conserved” on the tree</a:t>
+            </a:r>
+          </a:p>
+        </p:txBody>
+      </p:sp>
+      <p:sp>
+        <p:nvSpPr>
+          <p:cNvPr id="4" name="Content Placeholder 3"/>
+          <p:cNvSpPr>
+            <a:spLocks noGrp="1"/>
+          </p:cNvSpPr>
+          <p:nvPr>
+            <p:ph idx="2" sz="half"/>
+          </p:nvPr>
+        </p:nvSpPr>
+        <p:spPr/>
+        <p:txBody>
+          <a:bodyPr/>
+          <a:lstStyle/>
+          <a:p>
+            <a:pPr lvl="0" indent="0" marL="0">
+              <a:buNone/>
+            </a:pPr>
+            <a:r>
+              <a:rPr b="1"/>
+              <a:t>Weak/no signal</a:t>
+            </a:r>
+          </a:p>
+          <a:p>
+            <a:pPr lvl="0" indent="0" marL="0">
+              <a:buNone/>
+            </a:pPr>
+            <a:r>
+              <a:rPr/>
+              <a:t>Relatives look different → color changes fast, convergence is common</a:t>
+            </a:r>
+          </a:p>
+          <a:p>
+            <a:pPr lvl="0" indent="0" marL="0">
+              <a:buNone/>
+            </a:pPr>
+            <a:r>
+              <a:rPr i="1"/>
+              <a:t>Pattern evolves independently of relatedness</a:t>
+            </a:r>
+          </a:p>
+        </p:txBody>
+      </p:sp>
+    </p:spTree>
+  </p:cSld>
+</p:sld>
+</file>
+
+<file path=ppt/slides/slide11.xml><?xml version="1.0" encoding="utf-8"?>
+<p:sld xmlns:a="http://schemas.openxmlformats.org/drawingml/2006/main" xmlns:r="http://schemas.openxmlformats.org/officeDocument/2006/relationships" xmlns:p="http://schemas.openxmlformats.org/presentationml/2006/main">
+  <p:cSld>
+    <p:spTree>
+      <p:nvGrpSpPr>
+        <p:cNvPr id="1" name=""/>
+        <p:cNvGrpSpPr/>
+        <p:nvPr/>
+      </p:nvGrpSpPr>
+      <p:grpSpPr>
+        <a:xfrm>
+          <a:off x="0" y="0"/>
+          <a:ext cx="0" cy="0"/>
+          <a:chOff x="0" y="0"/>
+          <a:chExt cx="0" cy="0"/>
+        </a:xfrm>
+      </p:grpSpPr>
+      <p:sp>
+        <p:nvSpPr>
+          <p:cNvPr id="3" name="Content Placeholder 2"/>
+          <p:cNvSpPr>
+            <a:spLocks noGrp="1"/>
+          </p:cNvSpPr>
+          <p:nvPr>
+            <p:ph idx="1"/>
+          </p:nvPr>
+        </p:nvSpPr>
+        <p:spPr/>
+        <p:txBody>
+          <a:bodyPr/>
+          <a:lstStyle/>
+          <a:p>
+            <a:pPr lvl="0" indent="0" marL="0">
+              <a:buNone/>
+            </a:pPr>
+            <a:r>
+              <a:rPr/>
+              <a:t>We measure this with two statistics: </a:t>
+            </a:r>
+            <a:r>
+              <a:rPr b="1"/>
+              <a:t>Blomberg’s K</a:t>
+            </a:r>
+            <a:r>
+              <a:rPr/>
+              <a:t> and </a:t>
+            </a:r>
+            <a:r>
+              <a:rPr b="1"/>
+              <a:t>Pagel’s λ</a:t>
+            </a:r>
+          </a:p>
+        </p:txBody>
+      </p:sp>
+    </p:spTree>
+  </p:cSld>
+</p:sld>
+</file>
+
+<file path=ppt/slides/slide12.xml><?xml version="1.0" encoding="utf-8"?>
+<p:sld xmlns:a="http://schemas.openxmlformats.org/drawingml/2006/main" xmlns:r="http://schemas.openxmlformats.org/officeDocument/2006/relationships" xmlns:p="http://schemas.openxmlformats.org/presentationml/2006/main">
+  <p:cSld>
+    <p:spTree>
+      <p:nvGrpSpPr>
+        <p:cNvPr id="1" name=""/>
+        <p:cNvGrpSpPr/>
+        <p:nvPr/>
+      </p:nvGrpSpPr>
+      <p:grpSpPr>
+        <a:xfrm>
+          <a:off x="0" y="0"/>
+          <a:ext cx="0" cy="0"/>
+          <a:chOff x="0" y="0"/>
+          <a:chExt cx="0" cy="0"/>
+        </a:xfrm>
+      </p:grpSpPr>
+      <p:sp>
+        <p:nvSpPr>
           <p:cNvPr id="2" name="Title 1"/>
           <p:cNvSpPr>
             <a:spLocks noGrp="1"/>
@@ -3442,172 +3611,6 @@
 </p:sld>
 </file>
 
-<file path=ppt/slides/slide11.xml><?xml version="1.0" encoding="utf-8"?>
-<p:sld xmlns:a="http://schemas.openxmlformats.org/drawingml/2006/main" xmlns:r="http://schemas.openxmlformats.org/officeDocument/2006/relationships" xmlns:p="http://schemas.openxmlformats.org/presentationml/2006/main">
-  <p:cSld>
-    <p:spTree>
-      <p:nvGrpSpPr>
-        <p:cNvPr id="1" name=""/>
-        <p:cNvGrpSpPr/>
-        <p:nvPr/>
-      </p:nvGrpSpPr>
-      <p:grpSpPr>
-        <a:xfrm>
-          <a:off x="0" y="0"/>
-          <a:ext cx="0" cy="0"/>
-          <a:chOff x="0" y="0"/>
-          <a:chExt cx="0" cy="0"/>
-        </a:xfrm>
-      </p:grpSpPr>
-      <p:sp>
-        <p:nvSpPr>
-          <p:cNvPr id="3" name="Content Placeholder 2"/>
-          <p:cNvSpPr>
-            <a:spLocks noGrp="1"/>
-          </p:cNvSpPr>
-          <p:nvPr>
-            <p:ph idx="1"/>
-          </p:nvPr>
-        </p:nvSpPr>
-        <p:spPr/>
-        <p:txBody>
-          <a:bodyPr/>
-          <a:lstStyle/>
-          <a:p>
-            <a:pPr lvl="0" indent="0" marL="0">
-              <a:buNone/>
-            </a:pPr>
-            <a:r>
-              <a:rPr/>
-              <a:t>The </a:t>
-            </a:r>
-            <a:r>
-              <a:rPr b="1"/>
-              <a:t>p-value</a:t>
-            </a:r>
-            <a:r>
-              <a:rPr/>
-              <a:t> tells you if the signal is statistically significant:</a:t>
-            </a:r>
-          </a:p>
-          <a:p>
-            <a:pPr lvl="0"/>
-            <a:r>
-              <a:rPr b="1"/>
-              <a:t>p &lt; 0.05</a:t>
-            </a:r>
-            <a:r>
-              <a:rPr/>
-              <a:t> → yes, there’s real signal</a:t>
-            </a:r>
-          </a:p>
-          <a:p>
-            <a:pPr lvl="0"/>
-            <a:r>
-              <a:rPr b="1"/>
-              <a:t>p &gt; 0.05</a:t>
-            </a:r>
-            <a:r>
-              <a:rPr/>
-              <a:t> → can’t distinguish from random</a:t>
-            </a:r>
-          </a:p>
-          <a:p>
-            <a:pPr lvl="0" indent="0" marL="0">
-              <a:buNone/>
-            </a:pPr>
-            <a:r>
-              <a:rPr b="1"/>
-              <a:t>K = 0.16 with p = 0.04</a:t>
-            </a:r>
-            <a:r>
-              <a:rPr/>
-              <a:t> → “there IS signal, but it’s modest — color patterns show some phylogenetic conservatism but also a lot of independent change”</a:t>
-            </a:r>
-          </a:p>
-        </p:txBody>
-      </p:sp>
-    </p:spTree>
-  </p:cSld>
-</p:sld>
-</file>
-
-<file path=ppt/slides/slide12.xml><?xml version="1.0" encoding="utf-8"?>
-<p:sld xmlns:a="http://schemas.openxmlformats.org/drawingml/2006/main" xmlns:r="http://schemas.openxmlformats.org/officeDocument/2006/relationships" xmlns:p="http://schemas.openxmlformats.org/presentationml/2006/main">
-  <p:cSld>
-    <p:spTree>
-      <p:nvGrpSpPr>
-        <p:cNvPr id="1" name=""/>
-        <p:cNvGrpSpPr/>
-        <p:nvPr/>
-      </p:nvGrpSpPr>
-      <p:grpSpPr>
-        <a:xfrm>
-          <a:off x="0" y="0"/>
-          <a:ext cx="0" cy="0"/>
-          <a:chOff x="0" y="0"/>
-          <a:chExt cx="0" cy="0"/>
-        </a:xfrm>
-      </p:grpSpPr>
-      <p:sp>
-        <p:nvSpPr>
-          <p:cNvPr id="2" name="Title 1"/>
-          <p:cNvSpPr>
-            <a:spLocks noGrp="1"/>
-          </p:cNvSpPr>
-          <p:nvPr>
-            <p:ph type="title"/>
-          </p:nvPr>
-        </p:nvSpPr>
-        <p:spPr/>
-        <p:txBody>
-          <a:bodyPr/>
-          <a:lstStyle/>
-          <a:p>
-            <a:pPr lvl="0" indent="0" marL="0">
-              <a:buNone/>
-            </a:pPr>
-            <a:r>
-              <a:rPr/>
-              <a:t>contMap — painting traits on the tree</a:t>
-            </a:r>
-          </a:p>
-        </p:txBody>
-      </p:sp>
-      <p:sp>
-        <p:nvSpPr>
-          <p:cNvPr id="3" name="Content Placeholder 2"/>
-          <p:cNvSpPr>
-            <a:spLocks noGrp="1"/>
-          </p:cNvSpPr>
-          <p:nvPr>
-            <p:ph idx="1"/>
-          </p:nvPr>
-        </p:nvSpPr>
-        <p:spPr/>
-        <p:txBody>
-          <a:bodyPr/>
-          <a:lstStyle/>
-          <a:p>
-            <a:pPr lvl="0" indent="0" marL="0">
-              <a:buNone/>
-            </a:pPr>
-            <a:r>
-              <a:rPr b="1"/>
-              <a:t>contMap</a:t>
-            </a:r>
-            <a:r>
-              <a:rPr/>
-              <a:t> reconstructs ancestral trait values and paints them along every branch.</a:t>
-            </a:r>
-          </a:p>
-        </p:txBody>
-      </p:sp>
-    </p:spTree>
-  </p:cSld>
-</p:sld>
-</file>
-
 <file path=ppt/slides/slide13.xml><?xml version="1.0" encoding="utf-8"?>
 <p:sld xmlns:a="http://schemas.openxmlformats.org/drawingml/2006/main" xmlns:r="http://schemas.openxmlformats.org/officeDocument/2006/relationships" xmlns:p="http://schemas.openxmlformats.org/presentationml/2006/main">
   <p:cSld>
@@ -3632,122 +3635,63 @@
             <a:spLocks noGrp="1"/>
           </p:cNvSpPr>
           <p:nvPr>
-            <p:ph idx="1" sz="half"/>
-          </p:nvPr>
-        </p:nvSpPr>
-        <p:spPr/>
-        <p:txBody>
-          <a:bodyPr/>
-          <a:lstStyle/>
+            <p:ph idx="1"/>
+          </p:nvPr>
+        </p:nvSpPr>
+        <p:spPr/>
+        <p:txBody>
+          <a:bodyPr/>
+          <a:lstStyle/>
+          <a:p>
+            <a:pPr lvl="0" indent="0" marL="0">
+              <a:buNone/>
+            </a:pPr>
+            <a:r>
+              <a:rPr/>
+              <a:t>The </a:t>
+            </a:r>
+            <a:r>
+              <a:rPr b="1"/>
+              <a:t>p-value</a:t>
+            </a:r>
+            <a:r>
+              <a:rPr/>
+              <a:t> tells you if the signal is statistically significant:</a:t>
+            </a:r>
+          </a:p>
           <a:p>
             <a:pPr lvl="0"/>
             <a:r>
-              <a:rPr/>
-              <a:t>Cool colors (blue) = </a:t>
-            </a:r>
-            <a:r>
               <a:rPr b="1"/>
-              <a:t>simple</a:t>
-            </a:r>
-            <a:r>
-              <a:rPr/>
-              <a:t> patterns</a:t>
+              <a:t>p &lt; 0.05</a:t>
+            </a:r>
+            <a:r>
+              <a:rPr/>
+              <a:t> → yes, there’s real signal</a:t>
             </a:r>
           </a:p>
           <a:p>
             <a:pPr lvl="0"/>
             <a:r>
-              <a:rPr/>
-              <a:t>Warm colors (red) = </a:t>
-            </a:r>
-            <a:r>
               <a:rPr b="1"/>
-              <a:t>complex</a:t>
-            </a:r>
-            <a:r>
-              <a:rPr/>
-              <a:t> patterns</a:t>
-            </a:r>
-          </a:p>
-          <a:p>
-            <a:pPr lvl="0"/>
-            <a:r>
-              <a:rPr/>
-              <a:t>You can SEE where on the tree complexity changed</a:t>
-            </a:r>
-          </a:p>
-          <a:p>
-            <a:pPr lvl="0"/>
-            <a:r>
-              <a:rPr/>
-              <a:t>Look for </a:t>
-            </a:r>
+              <a:t>p &gt; 0.05</a:t>
+            </a:r>
+            <a:r>
+              <a:rPr/>
+              <a:t> → can’t distinguish from random</a:t>
+            </a:r>
+          </a:p>
+          <a:p>
+            <a:pPr lvl="0" indent="0" marL="0">
+              <a:buNone/>
+            </a:pPr>
             <a:r>
               <a:rPr b="1"/>
-              <a:t>abrupt shifts</a:t>
-            </a:r>
-            <a:r>
-              <a:rPr/>
-              <a:t> — those are evolutionary events</a:t>
-            </a:r>
-          </a:p>
-        </p:txBody>
-      </p:sp>
-      <p:sp>
-        <p:nvSpPr>
-          <p:cNvPr id="4" name="Content Placeholder 3"/>
-          <p:cNvSpPr>
-            <a:spLocks noGrp="1"/>
-          </p:cNvSpPr>
-          <p:nvPr>
-            <p:ph idx="2" sz="half"/>
-          </p:nvPr>
-        </p:nvSpPr>
-        <p:spPr/>
-        <p:txBody>
-          <a:bodyPr/>
-          <a:lstStyle/>
-          <a:p>
-            <a:pPr lvl="0" indent="0" marL="0">
-              <a:buNone/>
-            </a:pPr>
-            <a:r>
-              <a:rPr/>
-              <a:t>You’ll generate one of these in Section 5 of the worksheet.</a:t>
-            </a:r>
-          </a:p>
-          <a:p>
-            <a:pPr lvl="0" indent="0" marL="0">
-              <a:buNone/>
-            </a:pPr>
-            <a:r>
-              <a:rPr/>
-              <a:t>The most complex species? </a:t>
-            </a:r>
-            <a:r>
-              <a:rPr b="1" i="1"/>
-              <a:t>Acanthurus bariene</a:t>
-            </a:r>
-            <a:r>
-              <a:rPr/>
-              <a:t> — 19 pattern elements!</a:t>
-            </a:r>
-          </a:p>
-          <a:p>
-            <a:pPr lvl="0" indent="0" marL="0">
-              <a:buNone/>
-            </a:pPr>
-            <a:r>
-              <a:rPr/>
-              <a:t>The simplest? </a:t>
-            </a:r>
-            <a:r>
-              <a:rPr b="1" i="1"/>
-              <a:t>Zebrasoma rostratum</a:t>
-            </a:r>
-            <a:r>
-              <a:rPr/>
-              <a:t> — only 4 elements.</a:t>
+              <a:t>K = 0.16 with p = 0.04</a:t>
+            </a:r>
+            <a:r>
+              <a:rPr/>
+              <a:t> → “there IS signal, but it’s modest — color patterns show some phylogenetic conservatism but also a lot of independent change”</a:t>
             </a:r>
           </a:p>
         </p:txBody>
@@ -3794,7 +3738,7 @@
             </a:pPr>
             <a:r>
               <a:rPr/>
-              <a:t>Discrete traits — mapping presence/absence</a:t>
+              <a:t>contMap — painting traits on the tree</a:t>
             </a:r>
           </a:p>
         </p:txBody>
@@ -3818,29 +3762,12 @@
               <a:buNone/>
             </a:pPr>
             <a:r>
-              <a:rPr/>
-              <a:t>Not all traits are continuous. Some are </a:t>
-            </a:r>
-            <a:r>
               <a:rPr b="1"/>
-              <a:t>binary</a:t>
-            </a:r>
-            <a:r>
-              <a:rPr/>
-              <a:t>: the species either has it or doesn’t.</a:t>
-            </a:r>
-          </a:p>
-          <a:p>
-            <a:pPr lvl="0" indent="0" marL="0">
-              <a:buNone/>
-            </a:pPr>
-            <a:r>
-              <a:rPr b="1"/>
-              <a:t>Example: trunk marbling</a:t>
-            </a:r>
-            <a:r>
-              <a:rPr/>
-              <a:t> (irregular worm-like markings)</a:t>
+              <a:t>contMap</a:t>
+            </a:r>
+            <a:r>
+              <a:rPr/>
+              <a:t> reconstructs ancestral trait values and paints them along every branch.</a:t>
             </a:r>
           </a:p>
         </p:txBody>
@@ -3885,57 +3812,52 @@
             <a:pPr lvl="0"/>
             <a:r>
               <a:rPr/>
-              <a:t>17 of 62 species have trunk marbling</a:t>
+              <a:t>Cool colors (blue) = </a:t>
+            </a:r>
+            <a:r>
+              <a:rPr b="1"/>
+              <a:t>simple</a:t>
+            </a:r>
+            <a:r>
+              <a:rPr/>
+              <a:t> patterns</a:t>
             </a:r>
           </a:p>
           <a:p>
             <a:pPr lvl="0"/>
             <a:r>
               <a:rPr/>
-              <a:t>Concentrated in </a:t>
-            </a:r>
-            <a:r>
-              <a:rPr i="1"/>
-              <a:t>Acanthurus</a:t>
-            </a:r>
-            <a:r>
-              <a:rPr/>
-              <a:t> (11/26) and </a:t>
-            </a:r>
-            <a:r>
-              <a:rPr i="1"/>
-              <a:t>Ctenochaetus</a:t>
-            </a:r>
-            <a:r>
-              <a:rPr/>
-              <a:t> (3/6)</a:t>
+              <a:t>Warm colors (red) = </a:t>
+            </a:r>
+            <a:r>
+              <a:rPr b="1"/>
+              <a:t>complex</a:t>
+            </a:r>
+            <a:r>
+              <a:rPr/>
+              <a:t> patterns</a:t>
             </a:r>
           </a:p>
           <a:p>
             <a:pPr lvl="0"/>
             <a:r>
               <a:rPr/>
-              <a:t>Absent in </a:t>
-            </a:r>
-            <a:r>
-              <a:rPr i="1"/>
-              <a:t>Zebrasoma</a:t>
-            </a:r>
-            <a:r>
-              <a:rPr/>
-              <a:t>, </a:t>
-            </a:r>
-            <a:r>
-              <a:rPr i="1"/>
-              <a:t>Prionurus</a:t>
-            </a:r>
-            <a:r>
-              <a:rPr/>
-              <a:t>, </a:t>
-            </a:r>
-            <a:r>
-              <a:rPr i="1"/>
-              <a:t>Paracanthurus</a:t>
+              <a:t>You can SEE where on the tree complexity changed</a:t>
+            </a:r>
+          </a:p>
+          <a:p>
+            <a:pPr lvl="0"/>
+            <a:r>
+              <a:rPr/>
+              <a:t>Look for </a:t>
+            </a:r>
+            <a:r>
+              <a:rPr b="1"/>
+              <a:t>abrupt shifts</a:t>
+            </a:r>
+            <a:r>
+              <a:rPr/>
+              <a:t> — those are evolutionary events</a:t>
             </a:r>
           </a:p>
         </p:txBody>
@@ -3959,8 +3881,8 @@
               <a:buNone/>
             </a:pPr>
             <a:r>
-              <a:rPr b="1"/>
-              <a:t>Discussion question:</a:t>
+              <a:rPr/>
+              <a:t>You’ll generate one of these in Section 5 of the worksheet.</a:t>
             </a:r>
           </a:p>
           <a:p>
@@ -3969,7 +3891,15 @@
             </a:pPr>
             <a:r>
               <a:rPr/>
-              <a:t>Is marbling a Turing pattern?</a:t>
+              <a:t>The most complex species? </a:t>
+            </a:r>
+            <a:r>
+              <a:rPr b="1" i="1"/>
+              <a:t>Acanthurus bariene</a:t>
+            </a:r>
+            <a:r>
+              <a:rPr/>
+              <a:t> — 19 pattern elements!</a:t>
             </a:r>
           </a:p>
           <a:p>
@@ -3978,7 +3908,15 @@
             </a:pPr>
             <a:r>
               <a:rPr/>
-              <a:t>Think back to Lecture 12 — reaction-diffusion produces labyrinthine patterns that look a lot like “marbling.”</a:t>
+              <a:t>The simplest? </a:t>
+            </a:r>
+            <a:r>
+              <a:rPr b="1" i="1"/>
+              <a:t>Zebrasoma rostratum</a:t>
+            </a:r>
+            <a:r>
+              <a:rPr/>
+              <a:t> — only 4 elements.</a:t>
             </a:r>
           </a:p>
         </p:txBody>
@@ -4007,6 +3945,31 @@
       </p:grpSpPr>
       <p:sp>
         <p:nvSpPr>
+          <p:cNvPr id="2" name="Title 1"/>
+          <p:cNvSpPr>
+            <a:spLocks noGrp="1"/>
+          </p:cNvSpPr>
+          <p:nvPr>
+            <p:ph type="title"/>
+          </p:nvPr>
+        </p:nvSpPr>
+        <p:spPr/>
+        <p:txBody>
+          <a:bodyPr/>
+          <a:lstStyle/>
+          <a:p>
+            <a:pPr lvl="0" indent="0" marL="0">
+              <a:buNone/>
+            </a:pPr>
+            <a:r>
+              <a:rPr/>
+              <a:t>Discrete traits — mapping presence/absence</a:t>
+            </a:r>
+          </a:p>
+        </p:txBody>
+      </p:sp>
+      <p:sp>
+        <p:nvSpPr>
           <p:cNvPr id="3" name="Content Placeholder 2"/>
           <p:cNvSpPr>
             <a:spLocks noGrp="1"/>
@@ -4025,7 +3988,28 @@
             </a:pPr>
             <a:r>
               <a:rPr/>
-              <a:t>You’ll color tree tips by marbling presence and ask: how many times did it evolve?</a:t>
+              <a:t>Not all traits are continuous. Some are </a:t>
+            </a:r>
+            <a:r>
+              <a:rPr b="1"/>
+              <a:t>binary</a:t>
+            </a:r>
+            <a:r>
+              <a:rPr/>
+              <a:t>: the species either has it or doesn’t.</a:t>
+            </a:r>
+          </a:p>
+          <a:p>
+            <a:pPr lvl="0" indent="0" marL="0">
+              <a:buNone/>
+            </a:pPr>
+            <a:r>
+              <a:rPr b="1"/>
+              <a:t>Example: trunk marbling</a:t>
+            </a:r>
+            <a:r>
+              <a:rPr/>
+              <a:t> (irregular worm-like markings)</a:t>
             </a:r>
           </a:p>
         </p:txBody>
@@ -4036,6 +4020,191 @@
 </file>
 
 <file path=ppt/slides/slide17.xml><?xml version="1.0" encoding="utf-8"?>
+<p:sld xmlns:a="http://schemas.openxmlformats.org/drawingml/2006/main" xmlns:r="http://schemas.openxmlformats.org/officeDocument/2006/relationships" xmlns:p="http://schemas.openxmlformats.org/presentationml/2006/main">
+  <p:cSld>
+    <p:spTree>
+      <p:nvGrpSpPr>
+        <p:cNvPr id="1" name=""/>
+        <p:cNvGrpSpPr/>
+        <p:nvPr/>
+      </p:nvGrpSpPr>
+      <p:grpSpPr>
+        <a:xfrm>
+          <a:off x="0" y="0"/>
+          <a:ext cx="0" cy="0"/>
+          <a:chOff x="0" y="0"/>
+          <a:chExt cx="0" cy="0"/>
+        </a:xfrm>
+      </p:grpSpPr>
+      <p:sp>
+        <p:nvSpPr>
+          <p:cNvPr id="3" name="Content Placeholder 2"/>
+          <p:cNvSpPr>
+            <a:spLocks noGrp="1"/>
+          </p:cNvSpPr>
+          <p:nvPr>
+            <p:ph idx="1" sz="half"/>
+          </p:nvPr>
+        </p:nvSpPr>
+        <p:spPr/>
+        <p:txBody>
+          <a:bodyPr/>
+          <a:lstStyle/>
+          <a:p>
+            <a:pPr lvl="0"/>
+            <a:r>
+              <a:rPr/>
+              <a:t>17 of 62 species have trunk marbling</a:t>
+            </a:r>
+          </a:p>
+          <a:p>
+            <a:pPr lvl="0"/>
+            <a:r>
+              <a:rPr/>
+              <a:t>Concentrated in </a:t>
+            </a:r>
+            <a:r>
+              <a:rPr i="1"/>
+              <a:t>Acanthurus</a:t>
+            </a:r>
+            <a:r>
+              <a:rPr/>
+              <a:t> (11/26) and </a:t>
+            </a:r>
+            <a:r>
+              <a:rPr i="1"/>
+              <a:t>Ctenochaetus</a:t>
+            </a:r>
+            <a:r>
+              <a:rPr/>
+              <a:t> (3/6)</a:t>
+            </a:r>
+          </a:p>
+          <a:p>
+            <a:pPr lvl="0"/>
+            <a:r>
+              <a:rPr/>
+              <a:t>Absent in </a:t>
+            </a:r>
+            <a:r>
+              <a:rPr i="1"/>
+              <a:t>Zebrasoma</a:t>
+            </a:r>
+            <a:r>
+              <a:rPr/>
+              <a:t>, </a:t>
+            </a:r>
+            <a:r>
+              <a:rPr i="1"/>
+              <a:t>Prionurus</a:t>
+            </a:r>
+            <a:r>
+              <a:rPr/>
+              <a:t>, </a:t>
+            </a:r>
+            <a:r>
+              <a:rPr i="1"/>
+              <a:t>Paracanthurus</a:t>
+            </a:r>
+          </a:p>
+        </p:txBody>
+      </p:sp>
+      <p:sp>
+        <p:nvSpPr>
+          <p:cNvPr id="4" name="Content Placeholder 3"/>
+          <p:cNvSpPr>
+            <a:spLocks noGrp="1"/>
+          </p:cNvSpPr>
+          <p:nvPr>
+            <p:ph idx="2" sz="half"/>
+          </p:nvPr>
+        </p:nvSpPr>
+        <p:spPr/>
+        <p:txBody>
+          <a:bodyPr/>
+          <a:lstStyle/>
+          <a:p>
+            <a:pPr lvl="0" indent="0" marL="0">
+              <a:buNone/>
+            </a:pPr>
+            <a:r>
+              <a:rPr b="1"/>
+              <a:t>Discussion question:</a:t>
+            </a:r>
+          </a:p>
+          <a:p>
+            <a:pPr lvl="0" indent="0" marL="0">
+              <a:buNone/>
+            </a:pPr>
+            <a:r>
+              <a:rPr/>
+              <a:t>Is marbling a Turing pattern?</a:t>
+            </a:r>
+          </a:p>
+          <a:p>
+            <a:pPr lvl="0" indent="0" marL="0">
+              <a:buNone/>
+            </a:pPr>
+            <a:r>
+              <a:rPr/>
+              <a:t>Think back to Lecture 12 — reaction-diffusion produces labyrinthine patterns that look a lot like “marbling.”</a:t>
+            </a:r>
+          </a:p>
+        </p:txBody>
+      </p:sp>
+    </p:spTree>
+  </p:cSld>
+</p:sld>
+</file>
+
+<file path=ppt/slides/slide18.xml><?xml version="1.0" encoding="utf-8"?>
+<p:sld xmlns:a="http://schemas.openxmlformats.org/drawingml/2006/main" xmlns:r="http://schemas.openxmlformats.org/officeDocument/2006/relationships" xmlns:p="http://schemas.openxmlformats.org/presentationml/2006/main">
+  <p:cSld>
+    <p:spTree>
+      <p:nvGrpSpPr>
+        <p:cNvPr id="1" name=""/>
+        <p:cNvGrpSpPr/>
+        <p:nvPr/>
+      </p:nvGrpSpPr>
+      <p:grpSpPr>
+        <a:xfrm>
+          <a:off x="0" y="0"/>
+          <a:ext cx="0" cy="0"/>
+          <a:chOff x="0" y="0"/>
+          <a:chExt cx="0" cy="0"/>
+        </a:xfrm>
+      </p:grpSpPr>
+      <p:sp>
+        <p:nvSpPr>
+          <p:cNvPr id="3" name="Content Placeholder 2"/>
+          <p:cNvSpPr>
+            <a:spLocks noGrp="1"/>
+          </p:cNvSpPr>
+          <p:nvPr>
+            <p:ph idx="1"/>
+          </p:nvPr>
+        </p:nvSpPr>
+        <p:spPr/>
+        <p:txBody>
+          <a:bodyPr/>
+          <a:lstStyle/>
+          <a:p>
+            <a:pPr lvl="0" indent="0" marL="0">
+              <a:buNone/>
+            </a:pPr>
+            <a:r>
+              <a:rPr/>
+              <a:t>You’ll color tree tips by marbling presence and ask: how many times did it evolve?</a:t>
+            </a:r>
+          </a:p>
+        </p:txBody>
+      </p:sp>
+    </p:spTree>
+  </p:cSld>
+</p:sld>
+</file>
+
+<file path=ppt/slides/slide19.xml><?xml version="1.0" encoding="utf-8"?>
 <p:sld xmlns:a="http://schemas.openxmlformats.org/drawingml/2006/main" xmlns:r="http://schemas.openxmlformats.org/officeDocument/2006/relationships" xmlns:p="http://schemas.openxmlformats.org/presentationml/2006/main">
   <p:cSld>
     <p:spTree>
@@ -4674,185 +4843,6 @@
 </p:sld>
 </file>
 
-<file path=ppt/slides/slide18.xml><?xml version="1.0" encoding="utf-8"?>
-<p:sld xmlns:a="http://schemas.openxmlformats.org/drawingml/2006/main" xmlns:r="http://schemas.openxmlformats.org/officeDocument/2006/relationships" xmlns:p="http://schemas.openxmlformats.org/presentationml/2006/main">
-  <p:cSld>
-    <p:spTree>
-      <p:nvGrpSpPr>
-        <p:cNvPr id="1" name=""/>
-        <p:cNvGrpSpPr/>
-        <p:nvPr/>
-      </p:nvGrpSpPr>
-      <p:grpSpPr>
-        <a:xfrm>
-          <a:off x="0" y="0"/>
-          <a:ext cx="0" cy="0"/>
-          <a:chOff x="0" y="0"/>
-          <a:chExt cx="0" cy="0"/>
-        </a:xfrm>
-      </p:grpSpPr>
-      <p:sp>
-        <p:nvSpPr>
-          <p:cNvPr id="3" name="Content Placeholder 2"/>
-          <p:cNvSpPr>
-            <a:spLocks noGrp="1"/>
-          </p:cNvSpPr>
-          <p:nvPr>
-            <p:ph idx="1"/>
-          </p:nvPr>
-        </p:nvSpPr>
-        <p:spPr/>
-        <p:txBody>
-          <a:bodyPr/>
-          <a:lstStyle/>
-          <a:p>
-            <a:pPr lvl="0" indent="0" marL="0">
-              <a:buNone/>
-            </a:pPr>
-            <a:r>
-              <a:rPr b="1"/>
-              <a:t>~60 minutes of guided work, then 15 minutes on your own</a:t>
-            </a:r>
-          </a:p>
-        </p:txBody>
-      </p:sp>
-    </p:spTree>
-  </p:cSld>
-</p:sld>
-</file>
-
-<file path=ppt/slides/slide19.xml><?xml version="1.0" encoding="utf-8"?>
-<p:sld xmlns:a="http://schemas.openxmlformats.org/drawingml/2006/main" xmlns:r="http://schemas.openxmlformats.org/officeDocument/2006/relationships" xmlns:p="http://schemas.openxmlformats.org/presentationml/2006/main">
-  <p:cSld>
-    <p:spTree>
-      <p:nvGrpSpPr>
-        <p:cNvPr id="1" name=""/>
-        <p:cNvGrpSpPr/>
-        <p:nvPr/>
-      </p:nvGrpSpPr>
-      <p:grpSpPr>
-        <a:xfrm>
-          <a:off x="0" y="0"/>
-          <a:ext cx="0" cy="0"/>
-          <a:chOff x="0" y="0"/>
-          <a:chExt cx="0" cy="0"/>
-        </a:xfrm>
-      </p:grpSpPr>
-      <p:sp>
-        <p:nvSpPr>
-          <p:cNvPr id="2" name="Title 1"/>
-          <p:cNvSpPr>
-            <a:spLocks noGrp="1"/>
-          </p:cNvSpPr>
-          <p:nvPr>
-            <p:ph type="title"/>
-          </p:nvPr>
-        </p:nvSpPr>
-        <p:spPr/>
-        <p:txBody>
-          <a:bodyPr/>
-          <a:lstStyle/>
-          <a:p>
-            <a:pPr lvl="0" indent="0" marL="0">
-              <a:buNone/>
-            </a:pPr>
-            <a:r>
-              <a:rPr/>
-              <a:t>What you’ll turn in</a:t>
-            </a:r>
-          </a:p>
-        </p:txBody>
-      </p:sp>
-      <p:sp>
-        <p:nvSpPr>
-          <p:cNvPr id="3" name="Content Placeholder 2"/>
-          <p:cNvSpPr>
-            <a:spLocks noGrp="1"/>
-          </p:cNvSpPr>
-          <p:nvPr>
-            <p:ph idx="1"/>
-          </p:nvPr>
-        </p:nvSpPr>
-        <p:spPr/>
-        <p:txBody>
-          <a:bodyPr/>
-          <a:lstStyle/>
-          <a:p>
-            <a:pPr lvl="0" indent="-342900" marL="342900">
-              <a:buAutoNum type="arabicPeriod"/>
-            </a:pPr>
-            <a:r>
-              <a:rPr b="1"/>
-              <a:t>Screenshot</a:t>
-            </a:r>
-            <a:r>
-              <a:rPr/>
-              <a:t> of your contMap (pattern complexity on the tree)</a:t>
-            </a:r>
-          </a:p>
-          <a:p>
-            <a:pPr lvl="0" indent="-342900" marL="342900">
-              <a:buAutoNum type="arabicPeriod"/>
-            </a:pPr>
-            <a:r>
-              <a:rPr b="1"/>
-              <a:t>Your K and λ values</a:t>
-            </a:r>
-            <a:r>
-              <a:rPr/>
-              <a:t> with a one-sentence interpretation each</a:t>
-            </a:r>
-          </a:p>
-          <a:p>
-            <a:pPr lvl="0" indent="-342900" marL="342900">
-              <a:buAutoNum type="arabicPeriod"/>
-            </a:pPr>
-            <a:r>
-              <a:rPr b="1"/>
-              <a:t>Your chosen trait</a:t>
-            </a:r>
-            <a:r>
-              <a:rPr/>
-              <a:t> from “Your Turn” — which trait did you pick? What was K? Was it significant?</a:t>
-            </a:r>
-          </a:p>
-          <a:p>
-            <a:pPr lvl="0" indent="-342900" marL="342900">
-              <a:buAutoNum type="arabicPeriod"/>
-            </a:pPr>
-            <a:r>
-              <a:rPr b="1"/>
-              <a:t>One paragraph</a:t>
-            </a:r>
-            <a:r>
-              <a:rPr/>
-              <a:t>: “Is color pattern diversity phylogenetically conserved in surgeonfishes? Why or why not?”</a:t>
-            </a:r>
-          </a:p>
-          <a:p>
-            <a:pPr lvl="0" indent="0" marL="0">
-              <a:buNone/>
-            </a:pPr>
-            <a:r>
-              <a:rPr/>
-              <a:t>There is no single “right answer” — we want a </a:t>
-            </a:r>
-            <a:r>
-              <a:rPr b="1"/>
-              <a:t>nuanced</a:t>
-            </a:r>
-            <a:r>
-              <a:rPr/>
-              <a:t> interpretation backed by your data.</a:t>
-            </a:r>
-          </a:p>
-        </p:txBody>
-      </p:sp>
-    </p:spTree>
-  </p:cSld>
-</p:sld>
-</file>
-
 <file path=ppt/slides/slide2.xml><?xml version="1.0" encoding="utf-8"?>
 <p:sld xmlns:a="http://schemas.openxmlformats.org/drawingml/2006/main" xmlns:r="http://schemas.openxmlformats.org/officeDocument/2006/relationships" xmlns:p="http://schemas.openxmlformats.org/presentationml/2006/main">
   <p:cSld>
@@ -4962,6 +4952,185 @@
       </p:grpSpPr>
       <p:sp>
         <p:nvSpPr>
+          <p:cNvPr id="3" name="Content Placeholder 2"/>
+          <p:cNvSpPr>
+            <a:spLocks noGrp="1"/>
+          </p:cNvSpPr>
+          <p:nvPr>
+            <p:ph idx="1"/>
+          </p:nvPr>
+        </p:nvSpPr>
+        <p:spPr/>
+        <p:txBody>
+          <a:bodyPr/>
+          <a:lstStyle/>
+          <a:p>
+            <a:pPr lvl="0" indent="0" marL="0">
+              <a:buNone/>
+            </a:pPr>
+            <a:r>
+              <a:rPr b="1"/>
+              <a:t>~60 minutes of guided work, then 15 minutes on your own</a:t>
+            </a:r>
+          </a:p>
+        </p:txBody>
+      </p:sp>
+    </p:spTree>
+  </p:cSld>
+</p:sld>
+</file>
+
+<file path=ppt/slides/slide21.xml><?xml version="1.0" encoding="utf-8"?>
+<p:sld xmlns:a="http://schemas.openxmlformats.org/drawingml/2006/main" xmlns:r="http://schemas.openxmlformats.org/officeDocument/2006/relationships" xmlns:p="http://schemas.openxmlformats.org/presentationml/2006/main">
+  <p:cSld>
+    <p:spTree>
+      <p:nvGrpSpPr>
+        <p:cNvPr id="1" name=""/>
+        <p:cNvGrpSpPr/>
+        <p:nvPr/>
+      </p:nvGrpSpPr>
+      <p:grpSpPr>
+        <a:xfrm>
+          <a:off x="0" y="0"/>
+          <a:ext cx="0" cy="0"/>
+          <a:chOff x="0" y="0"/>
+          <a:chExt cx="0" cy="0"/>
+        </a:xfrm>
+      </p:grpSpPr>
+      <p:sp>
+        <p:nvSpPr>
+          <p:cNvPr id="2" name="Title 1"/>
+          <p:cNvSpPr>
+            <a:spLocks noGrp="1"/>
+          </p:cNvSpPr>
+          <p:nvPr>
+            <p:ph type="title"/>
+          </p:nvPr>
+        </p:nvSpPr>
+        <p:spPr/>
+        <p:txBody>
+          <a:bodyPr/>
+          <a:lstStyle/>
+          <a:p>
+            <a:pPr lvl="0" indent="0" marL="0">
+              <a:buNone/>
+            </a:pPr>
+            <a:r>
+              <a:rPr/>
+              <a:t>What you’ll turn in</a:t>
+            </a:r>
+          </a:p>
+        </p:txBody>
+      </p:sp>
+      <p:sp>
+        <p:nvSpPr>
+          <p:cNvPr id="3" name="Content Placeholder 2"/>
+          <p:cNvSpPr>
+            <a:spLocks noGrp="1"/>
+          </p:cNvSpPr>
+          <p:nvPr>
+            <p:ph idx="1"/>
+          </p:nvPr>
+        </p:nvSpPr>
+        <p:spPr/>
+        <p:txBody>
+          <a:bodyPr/>
+          <a:lstStyle/>
+          <a:p>
+            <a:pPr lvl="0" indent="-342900" marL="342900">
+              <a:buAutoNum type="arabicPeriod"/>
+            </a:pPr>
+            <a:r>
+              <a:rPr b="1"/>
+              <a:t>Screenshot</a:t>
+            </a:r>
+            <a:r>
+              <a:rPr/>
+              <a:t> of your contMap (pattern complexity on the tree)</a:t>
+            </a:r>
+          </a:p>
+          <a:p>
+            <a:pPr lvl="0" indent="-342900" marL="342900">
+              <a:buAutoNum type="arabicPeriod"/>
+            </a:pPr>
+            <a:r>
+              <a:rPr b="1"/>
+              <a:t>Your K and λ values</a:t>
+            </a:r>
+            <a:r>
+              <a:rPr/>
+              <a:t> with a one-sentence interpretation each</a:t>
+            </a:r>
+          </a:p>
+          <a:p>
+            <a:pPr lvl="0" indent="-342900" marL="342900">
+              <a:buAutoNum type="arabicPeriod"/>
+            </a:pPr>
+            <a:r>
+              <a:rPr b="1"/>
+              <a:t>Your chosen trait</a:t>
+            </a:r>
+            <a:r>
+              <a:rPr/>
+              <a:t> from “Your Turn” — which trait did you pick? What was K? Was it significant?</a:t>
+            </a:r>
+          </a:p>
+          <a:p>
+            <a:pPr lvl="0" indent="-342900" marL="342900">
+              <a:buAutoNum type="arabicPeriod"/>
+            </a:pPr>
+            <a:r>
+              <a:rPr b="1"/>
+              <a:t>One paragraph</a:t>
+            </a:r>
+            <a:r>
+              <a:rPr/>
+              <a:t>: “Is color pattern diversity phylogenetically conserved in surgeonfishes? Why or why not?”</a:t>
+            </a:r>
+          </a:p>
+          <a:p>
+            <a:pPr lvl="0" indent="0" marL="0">
+              <a:buNone/>
+            </a:pPr>
+            <a:r>
+              <a:rPr/>
+              <a:t>There is no single “right answer” — we want a </a:t>
+            </a:r>
+            <a:r>
+              <a:rPr b="1"/>
+              <a:t>nuanced</a:t>
+            </a:r>
+            <a:r>
+              <a:rPr/>
+              <a:t> interpretation backed by your data.</a:t>
+            </a:r>
+          </a:p>
+        </p:txBody>
+      </p:sp>
+    </p:spTree>
+  </p:cSld>
+</p:sld>
+</file>
+
+<file path=ppt/slides/slide22.xml><?xml version="1.0" encoding="utf-8"?>
+<p:sld xmlns:a="http://schemas.openxmlformats.org/drawingml/2006/main" xmlns:r="http://schemas.openxmlformats.org/officeDocument/2006/relationships" xmlns:p="http://schemas.openxmlformats.org/presentationml/2006/main">
+  <p:cSld>
+    <p:spTree>
+      <p:nvGrpSpPr>
+        <p:cNvPr id="1" name=""/>
+        <p:cNvGrpSpPr/>
+        <p:nvPr/>
+      </p:nvGrpSpPr>
+      <p:grpSpPr>
+        <a:xfrm>
+          <a:off x="0" y="0"/>
+          <a:ext cx="0" cy="0"/>
+          <a:chOff x="0" y="0"/>
+          <a:chExt cx="0" cy="0"/>
+        </a:xfrm>
+      </p:grpSpPr>
+      <p:sp>
+        <p:nvSpPr>
           <p:cNvPr id="2" name="Title 1"/>
           <p:cNvSpPr>
             <a:spLocks noGrp="1"/>
@@ -5355,7 +5524,7 @@
             </a:pPr>
             <a:r>
               <a:rPr/>
-              <a:t>What are we mapping onto the tree?</a:t>
+              <a:t>Where the data comes from — Frederich et al. 2026</a:t>
             </a:r>
           </a:p>
         </p:txBody>
@@ -5375,16 +5544,24 @@
           <a:bodyPr/>
           <a:lstStyle/>
           <a:p>
-            <a:pPr lvl="0" indent="0" marL="0">
-              <a:buNone/>
-            </a:pPr>
-            <a:r>
-              <a:rPr b="1"/>
-              <a:t>Color pattern traits</a:t>
-            </a:r>
-            <a:r>
-              <a:rPr/>
-              <a:t> — coded by Frederich et al. for each species:</a:t>
+            <a:pPr lvl="0" indent="0" marL="1270000">
+              <a:buNone/>
+            </a:pPr>
+            <a:r>
+              <a:rPr sz="2000" b="1"/>
+              <a:t>Rapid and repeated evolution of the pigmentation patterns in reef fishes</a:t>
+            </a:r>
+            <a:r>
+              <a:rPr sz="2000"/>
+              <a:t> Frederich, Mittelheiser, Gillet, Hodge &amp; Laudet · </a:t>
+            </a:r>
+            <a:r>
+              <a:rPr sz="2000" i="1"/>
+              <a:t>BMC Biology</a:t>
+            </a:r>
+            <a:r>
+              <a:rPr sz="2000"/>
+              <a:t> 2026</a:t>
             </a:r>
           </a:p>
         </p:txBody>
@@ -5431,102 +5608,122 @@
             </a:pPr>
             <a:r>
               <a:rPr b="1"/>
-              <a:t>HEAD (H_)</a:t>
+              <a:t>What they did</a:t>
             </a:r>
           </a:p>
           <a:p>
             <a:pPr lvl="0"/>
             <a:r>
               <a:rPr/>
-              <a:t>Colors</a:t>
+              <a:t>Scored </a:t>
+            </a:r>
+            <a:r>
+              <a:rPr b="1"/>
+              <a:t>6 reef-fish families</a:t>
+            </a:r>
+            <a:r>
+              <a:rPr/>
+              <a:t> (Acanthuridae, Chaetodontidae, Lutjanidae, Mullidae, Pomacanthidae, Pomacentridae)</a:t>
             </a:r>
           </a:p>
           <a:p>
             <a:pPr lvl="0"/>
             <a:r>
               <a:rPr/>
-              <a:t>Horizontal stripes</a:t>
+              <a:t>For every species: </a:t>
+            </a:r>
+            <a:r>
+              <a:rPr b="1"/>
+              <a:t>57 binary characters</a:t>
+            </a:r>
+            <a:r>
+              <a:rPr/>
+              <a:t> describing the pigmentation pattern (1 = present, 0 = absent)</a:t>
             </a:r>
           </a:p>
           <a:p>
             <a:pPr lvl="0"/>
             <a:r>
               <a:rPr/>
-              <a:t>Vertical stripes</a:t>
+              <a:t>Computed Gower distance → PCoA → quantified pattern diversity through time and across regions</a:t>
             </a:r>
           </a:p>
           <a:p>
             <a:pPr lvl="0"/>
             <a:r>
               <a:rPr/>
-              <a:t>Eyespots</a:t>
+              <a:t>Asked: how fast and how often do these patterns evolve?</a:t>
+            </a:r>
+          </a:p>
+        </p:txBody>
+      </p:sp>
+      <p:sp>
+        <p:nvSpPr>
+          <p:cNvPr id="4" name="Content Placeholder 3"/>
+          <p:cNvSpPr>
+            <a:spLocks noGrp="1"/>
+          </p:cNvSpPr>
+          <p:nvPr>
+            <p:ph idx="2" sz="half"/>
+          </p:nvPr>
+        </p:nvSpPr>
+        <p:spPr/>
+        <p:txBody>
+          <a:bodyPr/>
+          <a:lstStyle/>
+          <a:p>
+            <a:pPr lvl="0" indent="0" marL="0">
+              <a:buNone/>
+            </a:pPr>
+            <a:r>
+              <a:rPr b="1"/>
+              <a:t>Today: the Acanthuridae sub-dataset</a:t>
             </a:r>
           </a:p>
           <a:p>
             <a:pPr lvl="0"/>
             <a:r>
-              <a:rPr/>
-              <a:t>Marbling</a:t>
-            </a:r>
-          </a:p>
-        </p:txBody>
-      </p:sp>
-      <p:sp>
-        <p:nvSpPr>
-          <p:cNvPr id="4" name="Content Placeholder 3"/>
-          <p:cNvSpPr>
-            <a:spLocks noGrp="1"/>
-          </p:cNvSpPr>
-          <p:nvPr>
-            <p:ph idx="2" sz="half"/>
-          </p:nvPr>
-        </p:nvSpPr>
-        <p:spPr/>
-        <p:txBody>
-          <a:bodyPr/>
-          <a:lstStyle/>
+              <a:rPr b="1"/>
+              <a:t>65 surgeonfish species</a:t>
+            </a:r>
+            <a:r>
+              <a:rPr/>
+              <a:t> on a time-calibrated tree</a:t>
+            </a:r>
+          </a:p>
+          <a:p>
+            <a:pPr lvl="0"/>
+            <a:r>
+              <a:rPr b="1"/>
+              <a:t>59 columns</a:t>
+            </a:r>
+            <a:r>
+              <a:rPr/>
+              <a:t> per species (57 motif characters + species name + row index)</a:t>
+            </a:r>
+          </a:p>
+          <a:p>
+            <a:pPr lvl="0"/>
+            <a:r>
+              <a:rPr/>
+              <a:t>You’ll test for </a:t>
+            </a:r>
+            <a:r>
+              <a:rPr b="1"/>
+              <a:t>phylogenetic signal</a:t>
+            </a:r>
+            <a:r>
+              <a:rPr/>
+              <a:t> on each character (and on a composite “pattern complexity” score)</a:t>
+            </a:r>
+          </a:p>
           <a:p>
             <a:pPr lvl="0" indent="0" marL="0">
               <a:buNone/>
             </a:pPr>
             <a:r>
-              <a:rPr b="1"/>
-              <a:t>TRUNK (Tr_)</a:t>
-            </a:r>
-          </a:p>
-          <a:p>
-            <a:pPr lvl="0"/>
-            <a:r>
-              <a:rPr/>
-              <a:t>Colors</a:t>
-            </a:r>
-          </a:p>
-          <a:p>
-            <a:pPr lvl="0"/>
-            <a:r>
-              <a:rPr/>
-              <a:t>Horizontal stripes</a:t>
-            </a:r>
-          </a:p>
-          <a:p>
-            <a:pPr lvl="0"/>
-            <a:r>
-              <a:rPr/>
-              <a:t>Vertical stripes</a:t>
-            </a:r>
-          </a:p>
-          <a:p>
-            <a:pPr lvl="0"/>
-            <a:r>
-              <a:rPr/>
-              <a:t>Spots/points</a:t>
-            </a:r>
-          </a:p>
-          <a:p>
-            <a:pPr lvl="0"/>
-            <a:r>
-              <a:rPr/>
-              <a:t>Marbling</a:t>
+              <a:rPr i="1"/>
+              <a:t>Their punchline: pigmentation patterns evolve rapidly and convergently — same motifs reappear repeatedly across distant lineages.</a:t>
             </a:r>
           </a:p>
         </p:txBody>
@@ -5555,12 +5752,37 @@
       </p:grpSpPr>
       <p:sp>
         <p:nvSpPr>
+          <p:cNvPr id="2" name="Title 1"/>
+          <p:cNvSpPr>
+            <a:spLocks noGrp="1"/>
+          </p:cNvSpPr>
+          <p:nvPr>
+            <p:ph type="title"/>
+          </p:nvPr>
+        </p:nvSpPr>
+        <p:spPr/>
+        <p:txBody>
+          <a:bodyPr/>
+          <a:lstStyle/>
+          <a:p>
+            <a:pPr lvl="0" indent="0" marL="0">
+              <a:buNone/>
+            </a:pPr>
+            <a:r>
+              <a:rPr/>
+              <a:t>How they coded color — body regions × motif vocabulary</a:t>
+            </a:r>
+          </a:p>
+        </p:txBody>
+      </p:sp>
+      <p:sp>
+        <p:nvSpPr>
           <p:cNvPr id="3" name="Content Placeholder 2"/>
           <p:cNvSpPr>
             <a:spLocks noGrp="1"/>
           </p:cNvSpPr>
           <p:nvPr>
-            <p:ph idx="1"/>
+            <p:ph idx="1" sz="half"/>
           </p:nvPr>
         </p:nvSpPr>
         <p:spPr/>
@@ -5572,12 +5794,145 @@
               <a:buNone/>
             </a:pPr>
             <a:r>
+              <a:rPr/>
+              <a:t>         </a:t>
+            </a:r>
+          </a:p>
+          <a:p>
+            <a:pPr lvl="0" indent="0" marL="0">
+              <a:buNone/>
+            </a:pPr>
+          </a:p>
+          <a:p>
+            <a:pPr lvl="0" indent="0" marL="0">
+              <a:buNone/>
+            </a:pPr>
+            <a:r>
+              <a:rPr/>
+              <a:t> </a:t>
+            </a:r>
+          </a:p>
+          <a:p>
+            <a:pPr lvl="0" indent="0" marL="0">
+              <a:buNone/>
+            </a:pPr>
+          </a:p>
+          <a:p>
+            <a:pPr lvl="0" indent="0" marL="0">
+              <a:buNone/>
+            </a:pPr>
+          </a:p>
+          <a:p>
+            <a:pPr lvl="0" indent="0" marL="0">
+              <a:buNone/>
+            </a:pPr>
+            <a:r>
+              <a:rPr/>
+              <a:t> </a:t>
+            </a:r>
+          </a:p>
+          <a:p>
+            <a:pPr lvl="0" indent="0" marL="0">
+              <a:buNone/>
+            </a:pPr>
+            <a:r>
+              <a:rPr/>
+              <a:t>HEAD H_ (22 chars)</a:t>
+            </a:r>
+          </a:p>
+          <a:p>
+            <a:pPr lvl="0" indent="0" marL="0">
+              <a:buNone/>
+            </a:pPr>
+            <a:r>
+              <a:rPr/>
+              <a:t>TRUNK Tr_ (14 chars)</a:t>
+            </a:r>
+          </a:p>
+          <a:p>
+            <a:pPr lvl="0" indent="0" marL="0">
+              <a:buNone/>
+            </a:pPr>
+            <a:r>
+              <a:rPr/>
+              <a:t>TAIL Ta_ (17 chars)</a:t>
+            </a:r>
+          </a:p>
+          <a:p>
+            <a:pPr lvl="0" indent="0" marL="0">
+              <a:buNone/>
+            </a:pPr>
+            <a:r>
+              <a:rPr/>
+              <a:t> Every species is described by 57 binary characters spread across these three zones </a:t>
+            </a:r>
+          </a:p>
+        </p:txBody>
+      </p:sp>
+      <p:sp>
+        <p:nvSpPr>
+          <p:cNvPr id="4" name="Content Placeholder 3"/>
+          <p:cNvSpPr>
+            <a:spLocks noGrp="1"/>
+          </p:cNvSpPr>
+          <p:nvPr>
+            <p:ph idx="2" sz="half"/>
+          </p:nvPr>
+        </p:nvSpPr>
+        <p:spPr/>
+        <p:txBody>
+          <a:bodyPr/>
+          <a:lstStyle/>
+          <a:p>
+            <a:pPr lvl="0" indent="0" marL="0">
+              <a:buNone/>
+            </a:pPr>
+            <a:r>
               <a:rPr b="1"/>
-              <a:t>52 binary traits</a:t>
-            </a:r>
-            <a:r>
-              <a:rPr/>
-              <a:t> (present/absent) across 3 body regions = a detailed color pattern fingerprint for each species</a:t>
+              <a:t>Motif vocabulary</a:t>
+            </a:r>
+            <a:r>
+              <a:rPr/>
+              <a:t> </a:t>
+            </a:r>
+            <a:r>
+              <a:rPr i="1"/>
+              <a:t>(scored in each zone)</a:t>
+            </a:r>
+          </a:p>
+          <a:p>
+            <a:pPr lvl="0" indent="0" marL="0">
+              <a:buNone/>
+            </a:pPr>
+            <a:r>
+              <a:rPr/>
+              <a:t>Coded as </a:t>
+            </a:r>
+            <a:r>
+              <a:rPr b="1"/>
+              <a:t>1 = present, 0 = absent</a:t>
+            </a:r>
+            <a:r>
+              <a:rPr/>
+              <a:t>, plus “1 vs 2+” splits for stripes/stains/points (e.g., </a:t>
+            </a:r>
+            <a:r>
+              <a:rPr>
+                <a:latin typeface="Courier"/>
+              </a:rPr>
+              <a:t>H_2_h_strips_+</a:t>
+            </a:r>
+            <a:r>
+              <a:rPr/>
+              <a:t> means </a:t>
+            </a:r>
+            <a:r>
+              <a:rPr i="1"/>
+              <a:t>2 or more</a:t>
+            </a:r>
+            <a:r>
+              <a:rPr/>
+              <a:t> horizontal stripes on the head).</a:t>
             </a:r>
           </a:p>
         </p:txBody>
@@ -5624,44 +5979,71 @@
             </a:pPr>
             <a:r>
               <a:rPr/>
-              <a:t>What is phylogenetic signal?</a:t>
-            </a:r>
-          </a:p>
-        </p:txBody>
-      </p:sp>
-      <p:sp>
-        <p:nvSpPr>
-          <p:cNvPr id="3" name="Content Placeholder 2"/>
-          <p:cNvSpPr>
-            <a:spLocks noGrp="1"/>
-          </p:cNvSpPr>
-          <p:nvPr>
-            <p:ph idx="1"/>
-          </p:nvPr>
-        </p:nvSpPr>
-        <p:spPr/>
-        <p:txBody>
-          <a:bodyPr/>
-          <a:lstStyle/>
-          <a:p>
-            <a:pPr lvl="0" indent="0" marL="0">
-              <a:buNone/>
-            </a:pPr>
-            <a:r>
-              <a:rPr/>
-              <a:t>The tendency for </a:t>
-            </a:r>
-            <a:r>
-              <a:rPr b="1"/>
-              <a:t>closely related species to resemble each other</a:t>
-            </a:r>
-            <a:r>
-              <a:rPr/>
-              <a:t> more than distantly related species.</a:t>
-            </a:r>
-          </a:p>
-        </p:txBody>
-      </p:sp>
+              <a:t>How to read a coded species — three worked examples</a:t>
+            </a:r>
+          </a:p>
+        </p:txBody>
+      </p:sp>
+      <p:pic>
+        <p:nvPicPr>
+          <p:cNvPr descr="images/Zebrasoma_flavescens.png" id="0" name="Picture 1"/>
+          <p:cNvPicPr>
+            <a:picLocks noGrp="1" noChangeAspect="1"/>
+          </p:cNvPicPr>
+          <p:nvPr/>
+        </p:nvPicPr>
+        <p:blipFill>
+          <a:blip r:embed="rId2"/>
+          <a:stretch>
+            <a:fillRect/>
+          </a:stretch>
+        </p:blipFill>
+        <p:spPr bwMode="auto">
+          <a:xfrm>
+            <a:off x="457200" y="1473200"/>
+            <a:ext cx="4038600" cy="2819400"/>
+          </a:xfrm>
+          <a:prstGeom prst="rect">
+            <a:avLst/>
+          </a:prstGeom>
+          <a:noFill/>
+          <a:ln w="9525">
+            <a:noFill/>
+            <a:headEnd/>
+            <a:tailEnd/>
+          </a:ln>
+        </p:spPr>
+      </p:pic>
+      <p:pic>
+        <p:nvPicPr>
+          <p:cNvPr descr="images/Acanthurus_lineatus.png" id="0" name="Picture 1"/>
+          <p:cNvPicPr>
+            <a:picLocks noGrp="1" noChangeAspect="1"/>
+          </p:cNvPicPr>
+          <p:nvPr/>
+        </p:nvPicPr>
+        <p:blipFill>
+          <a:blip r:embed="rId3"/>
+          <a:stretch>
+            <a:fillRect/>
+          </a:stretch>
+        </p:blipFill>
+        <p:spPr bwMode="auto">
+          <a:xfrm>
+            <a:off x="4648200" y="1739900"/>
+            <a:ext cx="4038600" cy="2298700"/>
+          </a:xfrm>
+          <a:prstGeom prst="rect">
+            <a:avLst/>
+          </a:prstGeom>
+          <a:noFill/>
+          <a:ln w="9525">
+            <a:noFill/>
+            <a:headEnd/>
+            <a:tailEnd/>
+          </a:ln>
+        </p:spPr>
+      </p:pic>
     </p:spTree>
   </p:cSld>
 </p:sld>
@@ -5691,7 +6073,7 @@
             <a:spLocks noGrp="1"/>
           </p:cNvSpPr>
           <p:nvPr>
-            <p:ph idx="1" sz="half"/>
+            <p:ph idx="1"/>
           </p:nvPr>
         </p:nvSpPr>
         <p:spPr/>
@@ -5704,68 +6086,21 @@
             </a:pPr>
             <a:r>
               <a:rPr b="1"/>
-              <a:t>Strong signal</a:t>
-            </a:r>
-          </a:p>
-          <a:p>
-            <a:pPr lvl="0" indent="0" marL="0">
-              <a:buNone/>
-            </a:pPr>
-            <a:r>
-              <a:rPr/>
-              <a:t>Relatives look alike → color patterns evolve slowly</a:t>
-            </a:r>
-          </a:p>
-          <a:p>
-            <a:pPr lvl="0" indent="0" marL="0">
-              <a:buNone/>
-            </a:pPr>
-            <a:r>
-              <a:rPr i="1"/>
-              <a:t>Pattern is “conserved” on the tree</a:t>
-            </a:r>
-          </a:p>
-        </p:txBody>
-      </p:sp>
-      <p:sp>
-        <p:nvSpPr>
-          <p:cNvPr id="4" name="Content Placeholder 3"/>
-          <p:cNvSpPr>
-            <a:spLocks noGrp="1"/>
-          </p:cNvSpPr>
-          <p:nvPr>
-            <p:ph idx="2" sz="half"/>
-          </p:nvPr>
-        </p:nvSpPr>
-        <p:spPr/>
-        <p:txBody>
-          <a:bodyPr/>
-          <a:lstStyle/>
-          <a:p>
-            <a:pPr lvl="0" indent="0" marL="0">
-              <a:buNone/>
-            </a:pPr>
+              <a:t>Pattern complexity = </a:t>
+            </a:r>
+            <a:r>
+              <a:rPr b="1">
+                <a:latin typeface="Courier"/>
+              </a:rPr>
+              <a:t>rowSums(motifs)</a:t>
+            </a:r>
             <a:r>
               <a:rPr b="1"/>
-              <a:t>Weak/no signal</a:t>
-            </a:r>
-          </a:p>
-          <a:p>
-            <a:pPr lvl="0" indent="0" marL="0">
-              <a:buNone/>
-            </a:pPr>
-            <a:r>
-              <a:rPr/>
-              <a:t>Relatives look different → color changes fast, convergence is common</a:t>
-            </a:r>
-          </a:p>
-          <a:p>
-            <a:pPr lvl="0" indent="0" marL="0">
-              <a:buNone/>
-            </a:pPr>
-            <a:r>
-              <a:rPr i="1"/>
-              <a:t>Pattern evolves independently of relatedness</a:t>
+              <a:t> per species</a:t>
+            </a:r>
+            <a:r>
+              <a:rPr/>
+              <a:t> — the headline number you’ll map onto the tree today.</a:t>
             </a:r>
           </a:p>
         </p:txBody>
@@ -5794,6 +6129,31 @@
       </p:grpSpPr>
       <p:sp>
         <p:nvSpPr>
+          <p:cNvPr id="2" name="Title 1"/>
+          <p:cNvSpPr>
+            <a:spLocks noGrp="1"/>
+          </p:cNvSpPr>
+          <p:nvPr>
+            <p:ph type="title"/>
+          </p:nvPr>
+        </p:nvSpPr>
+        <p:spPr/>
+        <p:txBody>
+          <a:bodyPr/>
+          <a:lstStyle/>
+          <a:p>
+            <a:pPr lvl="0" indent="0" marL="0">
+              <a:buNone/>
+            </a:pPr>
+            <a:r>
+              <a:rPr/>
+              <a:t>What is phylogenetic signal?</a:t>
+            </a:r>
+          </a:p>
+        </p:txBody>
+      </p:sp>
+      <p:sp>
+        <p:nvSpPr>
           <p:cNvPr id="3" name="Content Placeholder 2"/>
           <p:cNvSpPr>
             <a:spLocks noGrp="1"/>
@@ -5812,19 +6172,15 @@
             </a:pPr>
             <a:r>
               <a:rPr/>
-              <a:t>We measure this with two statistics: </a:t>
+              <a:t>The tendency for </a:t>
             </a:r>
             <a:r>
               <a:rPr b="1"/>
-              <a:t>Blomberg’s K</a:t>
-            </a:r>
-            <a:r>
-              <a:rPr/>
-              <a:t> and </a:t>
-            </a:r>
-            <a:r>
-              <a:rPr b="1"/>
-              <a:t>Pagel’s λ</a:t>
+              <a:t>closely related species to resemble each other</a:t>
+            </a:r>
+            <a:r>
+              <a:rPr/>
+              <a:t> more than distantly related species.</a:t>
             </a:r>
           </a:p>
         </p:txBody>

--- a/slides/demo7-intro-slides.pptx
+++ b/slides/demo7-intro-slides.pptx
@@ -27,6 +27,11 @@
     <p:sldId id="275" r:id="rId21"/>
     <p:sldId id="276" r:id="rId22"/>
     <p:sldId id="277" r:id="rId23"/>
+    <p:sldId id="278" r:id="rId24"/>
+    <p:sldId id="279" r:id="rId25"/>
+    <p:sldId id="280" r:id="rId26"/>
+    <p:sldId id="281" r:id="rId27"/>
+    <p:sldId id="282" r:id="rId28"/>
   </p:sldIdLst>
   <p:sldSz cx="9144000" cy="5143500" type="screen16x9"/>
   <p:notesSz cx="6858000" cy="9144000"/>
@@ -3226,12 +3231,37 @@
       </p:grpSpPr>
       <p:sp>
         <p:nvSpPr>
+          <p:cNvPr id="2" name="Title 1"/>
+          <p:cNvSpPr>
+            <a:spLocks noGrp="1"/>
+          </p:cNvSpPr>
+          <p:nvPr>
+            <p:ph type="title"/>
+          </p:nvPr>
+        </p:nvSpPr>
+        <p:spPr/>
+        <p:txBody>
+          <a:bodyPr/>
+          <a:lstStyle/>
+          <a:p>
+            <a:pPr lvl="0" indent="0" marL="0">
+              <a:buNone/>
+            </a:pPr>
+            <a:r>
+              <a:rPr/>
+              <a:t>Five species, all 57 characters — the formal view</a:t>
+            </a:r>
+          </a:p>
+        </p:txBody>
+      </p:sp>
+      <p:sp>
+        <p:nvSpPr>
           <p:cNvPr id="3" name="Content Placeholder 2"/>
           <p:cNvSpPr>
             <a:spLocks noGrp="1"/>
           </p:cNvSpPr>
           <p:nvPr>
-            <p:ph idx="1" sz="half"/>
+            <p:ph idx="1"/>
           </p:nvPr>
         </p:nvSpPr>
         <p:spPr/>
@@ -3242,70 +3272,101 @@
             <a:pPr lvl="0" indent="0" marL="0">
               <a:buNone/>
             </a:pPr>
+          </a:p>
+          <a:p>
+            <a:pPr lvl="0"/>
             <a:r>
               <a:rPr b="1"/>
-              <a:t>Strong signal</a:t>
-            </a:r>
-          </a:p>
-          <a:p>
-            <a:pPr lvl="0" indent="0" marL="0">
-              <a:buNone/>
-            </a:pPr>
-            <a:r>
-              <a:rPr/>
-              <a:t>Relatives look alike → color patterns evolve slowly</a:t>
-            </a:r>
-          </a:p>
-          <a:p>
-            <a:pPr lvl="0" indent="0" marL="0">
-              <a:buNone/>
-            </a:pPr>
+              <a:t>Each row = a species</a:t>
+            </a:r>
+            <a:r>
+              <a:rPr/>
+              <a:t>; each column = one of the 57 binary characters.</a:t>
+            </a:r>
+          </a:p>
+          <a:p>
+            <a:pPr lvl="0"/>
+            <a:r>
+              <a:rPr b="1"/>
+              <a:t>Green = motif present (1); red = absent (0).</a:t>
+            </a:r>
+          </a:p>
+          <a:p>
+            <a:pPr lvl="0"/>
+            <a:r>
+              <a:rPr/>
+              <a:t>Top bands label the body region: </a:t>
+            </a:r>
+            <a:r>
+              <a:rPr b="1"/>
+              <a:t>INDEX</a:t>
+            </a:r>
+            <a:r>
+              <a:rPr/>
+              <a:t> · </a:t>
+            </a:r>
+            <a:r>
+              <a:rPr b="1"/>
+              <a:t>HEAD</a:t>
+            </a:r>
+            <a:r>
+              <a:rPr/>
+              <a:t> · </a:t>
+            </a:r>
+            <a:r>
+              <a:rPr b="1"/>
+              <a:t>TRUNK</a:t>
+            </a:r>
+            <a:r>
+              <a:rPr/>
+              <a:t> · </a:t>
+            </a:r>
+            <a:r>
+              <a:rPr b="1"/>
+              <a:t>TAIL</a:t>
+            </a:r>
+            <a:r>
+              <a:rPr/>
+              <a:t>.</a:t>
+            </a:r>
+          </a:p>
+          <a:p>
+            <a:pPr lvl="0"/>
+            <a:r>
+              <a:rPr/>
+              <a:t>Range from </a:t>
+            </a:r>
+            <a:r>
+              <a:rPr b="1"/>
+              <a:t>6 active motifs</a:t>
+            </a:r>
+            <a:r>
+              <a:rPr/>
+              <a:t> (</a:t>
+            </a:r>
             <a:r>
               <a:rPr i="1"/>
-              <a:t>Pattern is “conserved” on the tree</a:t>
-            </a:r>
-          </a:p>
-        </p:txBody>
-      </p:sp>
-      <p:sp>
-        <p:nvSpPr>
-          <p:cNvPr id="4" name="Content Placeholder 3"/>
-          <p:cNvSpPr>
-            <a:spLocks noGrp="1"/>
-          </p:cNvSpPr>
-          <p:nvPr>
-            <p:ph idx="2" sz="half"/>
-          </p:nvPr>
-        </p:nvSpPr>
-        <p:spPr/>
-        <p:txBody>
-          <a:bodyPr/>
-          <a:lstStyle/>
-          <a:p>
-            <a:pPr lvl="0" indent="0" marL="0">
-              <a:buNone/>
-            </a:pPr>
+              <a:t>Zebrasoma rostratum</a:t>
+            </a:r>
+            <a:r>
+              <a:rPr/>
+              <a:t>) to </a:t>
+            </a:r>
             <a:r>
               <a:rPr b="1"/>
-              <a:t>Weak/no signal</a:t>
-            </a:r>
-          </a:p>
-          <a:p>
-            <a:pPr lvl="0" indent="0" marL="0">
-              <a:buNone/>
-            </a:pPr>
-            <a:r>
-              <a:rPr/>
-              <a:t>Relatives look different → color changes fast, convergence is common</a:t>
-            </a:r>
-          </a:p>
-          <a:p>
-            <a:pPr lvl="0" indent="0" marL="0">
-              <a:buNone/>
-            </a:pPr>
+              <a:t>22</a:t>
+            </a:r>
+            <a:r>
+              <a:rPr/>
+              <a:t> (</a:t>
+            </a:r>
             <a:r>
               <a:rPr i="1"/>
-              <a:t>Pattern evolves independently of relatedness</a:t>
+              <a:t>Acanthurus bariene</a:t>
+            </a:r>
+            <a:r>
+              <a:rPr/>
+              <a:t>) across the family.</a:t>
             </a:r>
           </a:p>
         </p:txBody>
@@ -3334,6 +3395,31 @@
       </p:grpSpPr>
       <p:sp>
         <p:nvSpPr>
+          <p:cNvPr id="2" name="Title 1"/>
+          <p:cNvSpPr>
+            <a:spLocks noGrp="1"/>
+          </p:cNvSpPr>
+          <p:nvPr>
+            <p:ph type="title"/>
+          </p:nvPr>
+        </p:nvSpPr>
+        <p:spPr/>
+        <p:txBody>
+          <a:bodyPr/>
+          <a:lstStyle/>
+          <a:p>
+            <a:pPr lvl="0" indent="0" marL="0">
+              <a:buNone/>
+            </a:pPr>
+            <a:r>
+              <a:rPr/>
+              <a:t>Pattern complexity varies across the family</a:t>
+            </a:r>
+          </a:p>
+        </p:txBody>
+      </p:sp>
+      <p:sp>
+        <p:nvSpPr>
           <p:cNvPr id="3" name="Content Placeholder 2"/>
           <p:cNvSpPr>
             <a:spLocks noGrp="1"/>
@@ -3350,21 +3436,45 @@
             <a:pPr lvl="0" indent="0" marL="0">
               <a:buNone/>
             </a:pPr>
-            <a:r>
-              <a:rPr/>
-              <a:t>We measure this with two statistics: </a:t>
+          </a:p>
+          <a:p>
+            <a:pPr lvl="0" indent="0" marL="0">
+              <a:buNone/>
+            </a:pPr>
+            <a:r>
+              <a:rPr/>
+              <a:t>Distribution of motif counts across 83 Acanthuridae species. </a:t>
             </a:r>
             <a:r>
               <a:rPr b="1"/>
-              <a:t>Blomberg’s K</a:t>
-            </a:r>
-            <a:r>
-              <a:rPr/>
-              <a:t> and </a:t>
+              <a:t>Median = 12. Min = 6 (Zebrasoma rostratum). Max = 22 (Acanthurus bariene).</a:t>
+            </a:r>
+          </a:p>
+          <a:p>
+            <a:pPr lvl="0" indent="0" marL="0">
+              <a:buNone/>
+            </a:pPr>
+            <a:r>
+              <a:rPr/>
+              <a:t>This </a:t>
             </a:r>
             <a:r>
               <a:rPr b="1"/>
-              <a:t>Pagel’s λ</a:t>
+              <a:t>single number per species</a:t>
+            </a:r>
+            <a:r>
+              <a:rPr/>
+              <a:t> is what you’ll run through </a:t>
+            </a:r>
+            <a:r>
+              <a:rPr>
+                <a:latin typeface="Courier"/>
+              </a:rPr>
+              <a:t>contMap</a:t>
+            </a:r>
+            <a:r>
+              <a:rPr/>
+              <a:t>, Blomberg’s K, and Pagel’s λ in the worksheet.</a:t>
             </a:r>
           </a:p>
         </p:txBody>
@@ -3375,6 +3485,523 @@
 </file>
 
 <file path=ppt/slides/slide12.xml><?xml version="1.0" encoding="utf-8"?>
+<p:sld xmlns:a="http://schemas.openxmlformats.org/drawingml/2006/main" xmlns:r="http://schemas.openxmlformats.org/officeDocument/2006/relationships" xmlns:p="http://schemas.openxmlformats.org/presentationml/2006/main">
+  <p:cSld>
+    <p:spTree>
+      <p:nvGrpSpPr>
+        <p:cNvPr id="1" name=""/>
+        <p:cNvGrpSpPr/>
+        <p:nvPr/>
+      </p:nvGrpSpPr>
+      <p:grpSpPr>
+        <a:xfrm>
+          <a:off x="0" y="0"/>
+          <a:ext cx="0" cy="0"/>
+          <a:chOff x="0" y="0"/>
+          <a:chExt cx="0" cy="0"/>
+        </a:xfrm>
+      </p:grpSpPr>
+      <p:sp>
+        <p:nvSpPr>
+          <p:cNvPr id="2" name="Title 1"/>
+          <p:cNvSpPr>
+            <a:spLocks noGrp="1"/>
+          </p:cNvSpPr>
+          <p:nvPr>
+            <p:ph type="title"/>
+          </p:nvPr>
+        </p:nvSpPr>
+        <p:spPr/>
+        <p:txBody>
+          <a:bodyPr/>
+          <a:lstStyle/>
+          <a:p>
+            <a:pPr lvl="0" indent="0" marL="0">
+              <a:buNone/>
+            </a:pPr>
+            <a:r>
+              <a:rPr/>
+              <a:t>Result 1 — motif richness tracks species richness</a:t>
+            </a:r>
+          </a:p>
+        </p:txBody>
+      </p:sp>
+      <p:sp>
+        <p:nvSpPr>
+          <p:cNvPr id="3" name="Content Placeholder 2"/>
+          <p:cNvSpPr>
+            <a:spLocks noGrp="1"/>
+          </p:cNvSpPr>
+          <p:nvPr>
+            <p:ph idx="1"/>
+          </p:nvPr>
+        </p:nvSpPr>
+        <p:spPr/>
+        <p:txBody>
+          <a:bodyPr/>
+          <a:lstStyle/>
+          <a:p>
+            <a:pPr lvl="0" indent="0" marL="0">
+              <a:buNone/>
+            </a:pPr>
+          </a:p>
+          <a:p>
+            <a:pPr lvl="0"/>
+            <a:r>
+              <a:rPr b="1"/>
+              <a:t>Fig 1 from Frédérich et al. 2026.</a:t>
+            </a:r>
+            <a:r>
+              <a:rPr/>
+              <a:t> Each panel = one family × 5 biogeographic regions. </a:t>
+            </a:r>
+            <a:r>
+              <a:rPr i="1"/>
+              <a:t>Top row</a:t>
+            </a:r>
+            <a:r>
+              <a:rPr/>
+              <a:t> = full dataset, </a:t>
+            </a:r>
+            <a:r>
+              <a:rPr i="1"/>
+              <a:t>bottom row</a:t>
+            </a:r>
+            <a:r>
+              <a:rPr/>
+              <a:t> = re-sampled to avoid widespread-species inflation.</a:t>
+            </a:r>
+          </a:p>
+          <a:p>
+            <a:pPr lvl="0"/>
+            <a:r>
+              <a:rPr b="1"/>
+              <a:t>Every family × every sampling regime: R &gt; 0.96, p &lt; 0.01.</a:t>
+            </a:r>
+            <a:r>
+              <a:rPr/>
+              <a:t> More species in a region → more motif diversity.</a:t>
+            </a:r>
+          </a:p>
+          <a:p>
+            <a:pPr lvl="0"/>
+            <a:r>
+              <a:rPr b="1"/>
+              <a:t>Implication:</a:t>
+            </a:r>
+            <a:r>
+              <a:rPr/>
+              <a:t> speciation events drive pattern divergence — pattern diversity scales linearly with the species pool, not with the latitude/longitude of the reef.</a:t>
+            </a:r>
+          </a:p>
+        </p:txBody>
+      </p:sp>
+    </p:spTree>
+  </p:cSld>
+</p:sld>
+</file>
+
+<file path=ppt/slides/slide13.xml><?xml version="1.0" encoding="utf-8"?>
+<p:sld xmlns:a="http://schemas.openxmlformats.org/drawingml/2006/main" xmlns:r="http://schemas.openxmlformats.org/officeDocument/2006/relationships" xmlns:p="http://schemas.openxmlformats.org/presentationml/2006/main">
+  <p:cSld>
+    <p:spTree>
+      <p:nvGrpSpPr>
+        <p:cNvPr id="1" name=""/>
+        <p:cNvGrpSpPr/>
+        <p:nvPr/>
+      </p:nvGrpSpPr>
+      <p:grpSpPr>
+        <a:xfrm>
+          <a:off x="0" y="0"/>
+          <a:ext cx="0" cy="0"/>
+          <a:chOff x="0" y="0"/>
+          <a:chExt cx="0" cy="0"/>
+        </a:xfrm>
+      </p:grpSpPr>
+      <p:sp>
+        <p:nvSpPr>
+          <p:cNvPr id="2" name="Title 1"/>
+          <p:cNvSpPr>
+            <a:spLocks noGrp="1"/>
+          </p:cNvSpPr>
+          <p:nvPr>
+            <p:ph type="title"/>
+          </p:nvPr>
+        </p:nvSpPr>
+        <p:spPr/>
+        <p:txBody>
+          <a:bodyPr/>
+          <a:lstStyle/>
+          <a:p>
+            <a:pPr lvl="0" indent="0" marL="0">
+              <a:buNone/>
+            </a:pPr>
+            <a:r>
+              <a:rPr/>
+              <a:t>Result 2 — pattern evolution is rapid AND bounded</a:t>
+            </a:r>
+          </a:p>
+        </p:txBody>
+      </p:sp>
+      <p:pic>
+        <p:nvPicPr>
+          <p:cNvPr descr="images/frederich/fig2-frederich.png" id="0" name="Picture 1"/>
+          <p:cNvPicPr>
+            <a:picLocks noGrp="1" noChangeAspect="1"/>
+          </p:cNvPicPr>
+          <p:nvPr/>
+        </p:nvPicPr>
+        <p:blipFill>
+          <a:blip r:embed="rId2"/>
+          <a:stretch>
+            <a:fillRect/>
+          </a:stretch>
+        </p:blipFill>
+        <p:spPr bwMode="auto">
+          <a:xfrm>
+            <a:off x="457200" y="1574800"/>
+            <a:ext cx="4038600" cy="2616200"/>
+          </a:xfrm>
+          <a:prstGeom prst="rect">
+            <a:avLst/>
+          </a:prstGeom>
+          <a:noFill/>
+          <a:ln w="9525">
+            <a:noFill/>
+            <a:headEnd/>
+            <a:tailEnd/>
+          </a:ln>
+        </p:spPr>
+      </p:pic>
+      <p:sp>
+        <p:nvSpPr>
+          <p:cNvPr id="4" name="Content Placeholder 3"/>
+          <p:cNvSpPr>
+            <a:spLocks noGrp="1"/>
+          </p:cNvSpPr>
+          <p:nvPr>
+            <p:ph idx="2" sz="half"/>
+          </p:nvPr>
+        </p:nvSpPr>
+        <p:spPr/>
+        <p:txBody>
+          <a:bodyPr/>
+          <a:lstStyle/>
+          <a:p>
+            <a:pPr lvl="0" indent="0" marL="0">
+              <a:buNone/>
+            </a:pPr>
+            <a:r>
+              <a:rPr b="1"/>
+              <a:t>Phylogenetic signal is weak in every family</a:t>
+            </a:r>
+            <a:r>
+              <a:rPr/>
+              <a:t> (multivariate Blomberg’s K, all p &lt; 0.01):</a:t>
+            </a:r>
+          </a:p>
+          <a:p>
+            <a:pPr lvl="0"/>
+            <a:r>
+              <a:rPr/>
+              <a:t>Best-fit evolutionary model: </a:t>
+            </a:r>
+            <a:r>
+              <a:rPr b="1"/>
+              <a:t>OU1</a:t>
+            </a:r>
+            <a:r>
+              <a:rPr/>
+              <a:t> (single optimum, bounded morphospace) + </a:t>
+            </a:r>
+            <a:r>
+              <a:rPr b="1"/>
+              <a:t>AC</a:t>
+            </a:r>
+            <a:r>
+              <a:rPr/>
+              <a:t> (accelerating rate).</a:t>
+            </a:r>
+          </a:p>
+          <a:p>
+            <a:pPr lvl="0"/>
+            <a:r>
+              <a:rPr b="1"/>
+              <a:t>Phylogenetic half-life ≈ 1.5 Myr</a:t>
+            </a:r>
+            <a:r>
+              <a:rPr/>
+              <a:t> vs ~37.5 Myr for other fish morphological traits.</a:t>
+            </a:r>
+          </a:p>
+          <a:p>
+            <a:pPr lvl="0" indent="0" marL="0">
+              <a:buNone/>
+            </a:pPr>
+            <a:r>
+              <a:rPr b="1"/>
+              <a:t>Punchline:</a:t>
+            </a:r>
+            <a:r>
+              <a:rPr/>
+              <a:t> patterns evolve fast within a constrained set of motifs → strong convergence + recurring labyrinths, stripes, spots across distantly related lineages.</a:t>
+            </a:r>
+          </a:p>
+        </p:txBody>
+      </p:sp>
+    </p:spTree>
+  </p:cSld>
+</p:sld>
+</file>
+
+<file path=ppt/slides/slide14.xml><?xml version="1.0" encoding="utf-8"?>
+<p:sld xmlns:a="http://schemas.openxmlformats.org/drawingml/2006/main" xmlns:r="http://schemas.openxmlformats.org/officeDocument/2006/relationships" xmlns:p="http://schemas.openxmlformats.org/presentationml/2006/main">
+  <p:cSld>
+    <p:spTree>
+      <p:nvGrpSpPr>
+        <p:cNvPr id="1" name=""/>
+        <p:cNvGrpSpPr/>
+        <p:nvPr/>
+      </p:nvGrpSpPr>
+      <p:grpSpPr>
+        <a:xfrm>
+          <a:off x="0" y="0"/>
+          <a:ext cx="0" cy="0"/>
+          <a:chOff x="0" y="0"/>
+          <a:chExt cx="0" cy="0"/>
+        </a:xfrm>
+      </p:grpSpPr>
+      <p:sp>
+        <p:nvSpPr>
+          <p:cNvPr id="2" name="Title 1"/>
+          <p:cNvSpPr>
+            <a:spLocks noGrp="1"/>
+          </p:cNvSpPr>
+          <p:nvPr>
+            <p:ph type="title"/>
+          </p:nvPr>
+        </p:nvSpPr>
+        <p:spPr/>
+        <p:txBody>
+          <a:bodyPr/>
+          <a:lstStyle/>
+          <a:p>
+            <a:pPr lvl="0" indent="0" marL="0">
+              <a:buNone/>
+            </a:pPr>
+            <a:r>
+              <a:rPr/>
+              <a:t>What is phylogenetic signal?</a:t>
+            </a:r>
+          </a:p>
+        </p:txBody>
+      </p:sp>
+      <p:sp>
+        <p:nvSpPr>
+          <p:cNvPr id="3" name="Content Placeholder 2"/>
+          <p:cNvSpPr>
+            <a:spLocks noGrp="1"/>
+          </p:cNvSpPr>
+          <p:nvPr>
+            <p:ph idx="1"/>
+          </p:nvPr>
+        </p:nvSpPr>
+        <p:spPr/>
+        <p:txBody>
+          <a:bodyPr/>
+          <a:lstStyle/>
+          <a:p>
+            <a:pPr lvl="0" indent="0" marL="0">
+              <a:buNone/>
+            </a:pPr>
+            <a:r>
+              <a:rPr/>
+              <a:t>The tendency for </a:t>
+            </a:r>
+            <a:r>
+              <a:rPr b="1"/>
+              <a:t>closely related species to resemble each other</a:t>
+            </a:r>
+            <a:r>
+              <a:rPr/>
+              <a:t> more than distantly related species.</a:t>
+            </a:r>
+          </a:p>
+        </p:txBody>
+      </p:sp>
+    </p:spTree>
+  </p:cSld>
+</p:sld>
+</file>
+
+<file path=ppt/slides/slide15.xml><?xml version="1.0" encoding="utf-8"?>
+<p:sld xmlns:a="http://schemas.openxmlformats.org/drawingml/2006/main" xmlns:r="http://schemas.openxmlformats.org/officeDocument/2006/relationships" xmlns:p="http://schemas.openxmlformats.org/presentationml/2006/main">
+  <p:cSld>
+    <p:spTree>
+      <p:nvGrpSpPr>
+        <p:cNvPr id="1" name=""/>
+        <p:cNvGrpSpPr/>
+        <p:nvPr/>
+      </p:nvGrpSpPr>
+      <p:grpSpPr>
+        <a:xfrm>
+          <a:off x="0" y="0"/>
+          <a:ext cx="0" cy="0"/>
+          <a:chOff x="0" y="0"/>
+          <a:chExt cx="0" cy="0"/>
+        </a:xfrm>
+      </p:grpSpPr>
+      <p:sp>
+        <p:nvSpPr>
+          <p:cNvPr id="3" name="Content Placeholder 2"/>
+          <p:cNvSpPr>
+            <a:spLocks noGrp="1"/>
+          </p:cNvSpPr>
+          <p:nvPr>
+            <p:ph idx="1" sz="half"/>
+          </p:nvPr>
+        </p:nvSpPr>
+        <p:spPr/>
+        <p:txBody>
+          <a:bodyPr/>
+          <a:lstStyle/>
+          <a:p>
+            <a:pPr lvl="0" indent="0" marL="0">
+              <a:buNone/>
+            </a:pPr>
+            <a:r>
+              <a:rPr b="1"/>
+              <a:t>Strong signal</a:t>
+            </a:r>
+          </a:p>
+          <a:p>
+            <a:pPr lvl="0" indent="0" marL="0">
+              <a:buNone/>
+            </a:pPr>
+            <a:r>
+              <a:rPr/>
+              <a:t>Relatives look alike → color patterns evolve slowly</a:t>
+            </a:r>
+          </a:p>
+          <a:p>
+            <a:pPr lvl="0" indent="0" marL="0">
+              <a:buNone/>
+            </a:pPr>
+            <a:r>
+              <a:rPr i="1"/>
+              <a:t>Pattern is “conserved” on the tree</a:t>
+            </a:r>
+          </a:p>
+        </p:txBody>
+      </p:sp>
+      <p:sp>
+        <p:nvSpPr>
+          <p:cNvPr id="4" name="Content Placeholder 3"/>
+          <p:cNvSpPr>
+            <a:spLocks noGrp="1"/>
+          </p:cNvSpPr>
+          <p:nvPr>
+            <p:ph idx="2" sz="half"/>
+          </p:nvPr>
+        </p:nvSpPr>
+        <p:spPr/>
+        <p:txBody>
+          <a:bodyPr/>
+          <a:lstStyle/>
+          <a:p>
+            <a:pPr lvl="0" indent="0" marL="0">
+              <a:buNone/>
+            </a:pPr>
+            <a:r>
+              <a:rPr b="1"/>
+              <a:t>Weak/no signal</a:t>
+            </a:r>
+          </a:p>
+          <a:p>
+            <a:pPr lvl="0" indent="0" marL="0">
+              <a:buNone/>
+            </a:pPr>
+            <a:r>
+              <a:rPr/>
+              <a:t>Relatives look different → color changes fast, convergence is common</a:t>
+            </a:r>
+          </a:p>
+          <a:p>
+            <a:pPr lvl="0" indent="0" marL="0">
+              <a:buNone/>
+            </a:pPr>
+            <a:r>
+              <a:rPr i="1"/>
+              <a:t>Pattern evolves independently of relatedness</a:t>
+            </a:r>
+          </a:p>
+        </p:txBody>
+      </p:sp>
+    </p:spTree>
+  </p:cSld>
+</p:sld>
+</file>
+
+<file path=ppt/slides/slide16.xml><?xml version="1.0" encoding="utf-8"?>
+<p:sld xmlns:a="http://schemas.openxmlformats.org/drawingml/2006/main" xmlns:r="http://schemas.openxmlformats.org/officeDocument/2006/relationships" xmlns:p="http://schemas.openxmlformats.org/presentationml/2006/main">
+  <p:cSld>
+    <p:spTree>
+      <p:nvGrpSpPr>
+        <p:cNvPr id="1" name=""/>
+        <p:cNvGrpSpPr/>
+        <p:nvPr/>
+      </p:nvGrpSpPr>
+      <p:grpSpPr>
+        <a:xfrm>
+          <a:off x="0" y="0"/>
+          <a:ext cx="0" cy="0"/>
+          <a:chOff x="0" y="0"/>
+          <a:chExt cx="0" cy="0"/>
+        </a:xfrm>
+      </p:grpSpPr>
+      <p:sp>
+        <p:nvSpPr>
+          <p:cNvPr id="3" name="Content Placeholder 2"/>
+          <p:cNvSpPr>
+            <a:spLocks noGrp="1"/>
+          </p:cNvSpPr>
+          <p:nvPr>
+            <p:ph idx="1"/>
+          </p:nvPr>
+        </p:nvSpPr>
+        <p:spPr/>
+        <p:txBody>
+          <a:bodyPr/>
+          <a:lstStyle/>
+          <a:p>
+            <a:pPr lvl="0" indent="0" marL="0">
+              <a:buNone/>
+            </a:pPr>
+            <a:r>
+              <a:rPr/>
+              <a:t>We measure this with two statistics: </a:t>
+            </a:r>
+            <a:r>
+              <a:rPr b="1"/>
+              <a:t>Blomberg’s K</a:t>
+            </a:r>
+            <a:r>
+              <a:rPr/>
+              <a:t> and </a:t>
+            </a:r>
+            <a:r>
+              <a:rPr b="1"/>
+              <a:t>Pagel’s λ</a:t>
+            </a:r>
+          </a:p>
+        </p:txBody>
+      </p:sp>
+    </p:spTree>
+  </p:cSld>
+</p:sld>
+</file>
+
+<file path=ppt/slides/slide17.xml><?xml version="1.0" encoding="utf-8"?>
 <p:sld xmlns:a="http://schemas.openxmlformats.org/drawingml/2006/main" xmlns:r="http://schemas.openxmlformats.org/officeDocument/2006/relationships" xmlns:p="http://schemas.openxmlformats.org/presentationml/2006/main">
   <p:cSld>
     <p:spTree>
@@ -3611,552 +4238,6 @@
 </p:sld>
 </file>
 
-<file path=ppt/slides/slide13.xml><?xml version="1.0" encoding="utf-8"?>
-<p:sld xmlns:a="http://schemas.openxmlformats.org/drawingml/2006/main" xmlns:r="http://schemas.openxmlformats.org/officeDocument/2006/relationships" xmlns:p="http://schemas.openxmlformats.org/presentationml/2006/main">
-  <p:cSld>
-    <p:spTree>
-      <p:nvGrpSpPr>
-        <p:cNvPr id="1" name=""/>
-        <p:cNvGrpSpPr/>
-        <p:nvPr/>
-      </p:nvGrpSpPr>
-      <p:grpSpPr>
-        <a:xfrm>
-          <a:off x="0" y="0"/>
-          <a:ext cx="0" cy="0"/>
-          <a:chOff x="0" y="0"/>
-          <a:chExt cx="0" cy="0"/>
-        </a:xfrm>
-      </p:grpSpPr>
-      <p:sp>
-        <p:nvSpPr>
-          <p:cNvPr id="3" name="Content Placeholder 2"/>
-          <p:cNvSpPr>
-            <a:spLocks noGrp="1"/>
-          </p:cNvSpPr>
-          <p:nvPr>
-            <p:ph idx="1"/>
-          </p:nvPr>
-        </p:nvSpPr>
-        <p:spPr/>
-        <p:txBody>
-          <a:bodyPr/>
-          <a:lstStyle/>
-          <a:p>
-            <a:pPr lvl="0" indent="0" marL="0">
-              <a:buNone/>
-            </a:pPr>
-            <a:r>
-              <a:rPr/>
-              <a:t>The </a:t>
-            </a:r>
-            <a:r>
-              <a:rPr b="1"/>
-              <a:t>p-value</a:t>
-            </a:r>
-            <a:r>
-              <a:rPr/>
-              <a:t> tells you if the signal is statistically significant:</a:t>
-            </a:r>
-          </a:p>
-          <a:p>
-            <a:pPr lvl="0"/>
-            <a:r>
-              <a:rPr b="1"/>
-              <a:t>p &lt; 0.05</a:t>
-            </a:r>
-            <a:r>
-              <a:rPr/>
-              <a:t> → yes, there’s real signal</a:t>
-            </a:r>
-          </a:p>
-          <a:p>
-            <a:pPr lvl="0"/>
-            <a:r>
-              <a:rPr b="1"/>
-              <a:t>p &gt; 0.05</a:t>
-            </a:r>
-            <a:r>
-              <a:rPr/>
-              <a:t> → can’t distinguish from random</a:t>
-            </a:r>
-          </a:p>
-          <a:p>
-            <a:pPr lvl="0" indent="0" marL="0">
-              <a:buNone/>
-            </a:pPr>
-            <a:r>
-              <a:rPr b="1"/>
-              <a:t>K = 0.16 with p = 0.04</a:t>
-            </a:r>
-            <a:r>
-              <a:rPr/>
-              <a:t> → “there IS signal, but it’s modest — color patterns show some phylogenetic conservatism but also a lot of independent change”</a:t>
-            </a:r>
-          </a:p>
-        </p:txBody>
-      </p:sp>
-    </p:spTree>
-  </p:cSld>
-</p:sld>
-</file>
-
-<file path=ppt/slides/slide14.xml><?xml version="1.0" encoding="utf-8"?>
-<p:sld xmlns:a="http://schemas.openxmlformats.org/drawingml/2006/main" xmlns:r="http://schemas.openxmlformats.org/officeDocument/2006/relationships" xmlns:p="http://schemas.openxmlformats.org/presentationml/2006/main">
-  <p:cSld>
-    <p:spTree>
-      <p:nvGrpSpPr>
-        <p:cNvPr id="1" name=""/>
-        <p:cNvGrpSpPr/>
-        <p:nvPr/>
-      </p:nvGrpSpPr>
-      <p:grpSpPr>
-        <a:xfrm>
-          <a:off x="0" y="0"/>
-          <a:ext cx="0" cy="0"/>
-          <a:chOff x="0" y="0"/>
-          <a:chExt cx="0" cy="0"/>
-        </a:xfrm>
-      </p:grpSpPr>
-      <p:sp>
-        <p:nvSpPr>
-          <p:cNvPr id="2" name="Title 1"/>
-          <p:cNvSpPr>
-            <a:spLocks noGrp="1"/>
-          </p:cNvSpPr>
-          <p:nvPr>
-            <p:ph type="title"/>
-          </p:nvPr>
-        </p:nvSpPr>
-        <p:spPr/>
-        <p:txBody>
-          <a:bodyPr/>
-          <a:lstStyle/>
-          <a:p>
-            <a:pPr lvl="0" indent="0" marL="0">
-              <a:buNone/>
-            </a:pPr>
-            <a:r>
-              <a:rPr/>
-              <a:t>contMap — painting traits on the tree</a:t>
-            </a:r>
-          </a:p>
-        </p:txBody>
-      </p:sp>
-      <p:sp>
-        <p:nvSpPr>
-          <p:cNvPr id="3" name="Content Placeholder 2"/>
-          <p:cNvSpPr>
-            <a:spLocks noGrp="1"/>
-          </p:cNvSpPr>
-          <p:nvPr>
-            <p:ph idx="1"/>
-          </p:nvPr>
-        </p:nvSpPr>
-        <p:spPr/>
-        <p:txBody>
-          <a:bodyPr/>
-          <a:lstStyle/>
-          <a:p>
-            <a:pPr lvl="0" indent="0" marL="0">
-              <a:buNone/>
-            </a:pPr>
-            <a:r>
-              <a:rPr b="1"/>
-              <a:t>contMap</a:t>
-            </a:r>
-            <a:r>
-              <a:rPr/>
-              <a:t> reconstructs ancestral trait values and paints them along every branch.</a:t>
-            </a:r>
-          </a:p>
-        </p:txBody>
-      </p:sp>
-    </p:spTree>
-  </p:cSld>
-</p:sld>
-</file>
-
-<file path=ppt/slides/slide15.xml><?xml version="1.0" encoding="utf-8"?>
-<p:sld xmlns:a="http://schemas.openxmlformats.org/drawingml/2006/main" xmlns:r="http://schemas.openxmlformats.org/officeDocument/2006/relationships" xmlns:p="http://schemas.openxmlformats.org/presentationml/2006/main">
-  <p:cSld>
-    <p:spTree>
-      <p:nvGrpSpPr>
-        <p:cNvPr id="1" name=""/>
-        <p:cNvGrpSpPr/>
-        <p:nvPr/>
-      </p:nvGrpSpPr>
-      <p:grpSpPr>
-        <a:xfrm>
-          <a:off x="0" y="0"/>
-          <a:ext cx="0" cy="0"/>
-          <a:chOff x="0" y="0"/>
-          <a:chExt cx="0" cy="0"/>
-        </a:xfrm>
-      </p:grpSpPr>
-      <p:sp>
-        <p:nvSpPr>
-          <p:cNvPr id="3" name="Content Placeholder 2"/>
-          <p:cNvSpPr>
-            <a:spLocks noGrp="1"/>
-          </p:cNvSpPr>
-          <p:nvPr>
-            <p:ph idx="1" sz="half"/>
-          </p:nvPr>
-        </p:nvSpPr>
-        <p:spPr/>
-        <p:txBody>
-          <a:bodyPr/>
-          <a:lstStyle/>
-          <a:p>
-            <a:pPr lvl="0"/>
-            <a:r>
-              <a:rPr/>
-              <a:t>Cool colors (blue) = </a:t>
-            </a:r>
-            <a:r>
-              <a:rPr b="1"/>
-              <a:t>simple</a:t>
-            </a:r>
-            <a:r>
-              <a:rPr/>
-              <a:t> patterns</a:t>
-            </a:r>
-          </a:p>
-          <a:p>
-            <a:pPr lvl="0"/>
-            <a:r>
-              <a:rPr/>
-              <a:t>Warm colors (red) = </a:t>
-            </a:r>
-            <a:r>
-              <a:rPr b="1"/>
-              <a:t>complex</a:t>
-            </a:r>
-            <a:r>
-              <a:rPr/>
-              <a:t> patterns</a:t>
-            </a:r>
-          </a:p>
-          <a:p>
-            <a:pPr lvl="0"/>
-            <a:r>
-              <a:rPr/>
-              <a:t>You can SEE where on the tree complexity changed</a:t>
-            </a:r>
-          </a:p>
-          <a:p>
-            <a:pPr lvl="0"/>
-            <a:r>
-              <a:rPr/>
-              <a:t>Look for </a:t>
-            </a:r>
-            <a:r>
-              <a:rPr b="1"/>
-              <a:t>abrupt shifts</a:t>
-            </a:r>
-            <a:r>
-              <a:rPr/>
-              <a:t> — those are evolutionary events</a:t>
-            </a:r>
-          </a:p>
-        </p:txBody>
-      </p:sp>
-      <p:sp>
-        <p:nvSpPr>
-          <p:cNvPr id="4" name="Content Placeholder 3"/>
-          <p:cNvSpPr>
-            <a:spLocks noGrp="1"/>
-          </p:cNvSpPr>
-          <p:nvPr>
-            <p:ph idx="2" sz="half"/>
-          </p:nvPr>
-        </p:nvSpPr>
-        <p:spPr/>
-        <p:txBody>
-          <a:bodyPr/>
-          <a:lstStyle/>
-          <a:p>
-            <a:pPr lvl="0" indent="0" marL="0">
-              <a:buNone/>
-            </a:pPr>
-            <a:r>
-              <a:rPr/>
-              <a:t>You’ll generate one of these in Section 5 of the worksheet.</a:t>
-            </a:r>
-          </a:p>
-          <a:p>
-            <a:pPr lvl="0" indent="0" marL="0">
-              <a:buNone/>
-            </a:pPr>
-            <a:r>
-              <a:rPr/>
-              <a:t>The most complex species? </a:t>
-            </a:r>
-            <a:r>
-              <a:rPr b="1" i="1"/>
-              <a:t>Acanthurus bariene</a:t>
-            </a:r>
-            <a:r>
-              <a:rPr/>
-              <a:t> — 19 pattern elements!</a:t>
-            </a:r>
-          </a:p>
-          <a:p>
-            <a:pPr lvl="0" indent="0" marL="0">
-              <a:buNone/>
-            </a:pPr>
-            <a:r>
-              <a:rPr/>
-              <a:t>The simplest? </a:t>
-            </a:r>
-            <a:r>
-              <a:rPr b="1" i="1"/>
-              <a:t>Zebrasoma rostratum</a:t>
-            </a:r>
-            <a:r>
-              <a:rPr/>
-              <a:t> — only 4 elements.</a:t>
-            </a:r>
-          </a:p>
-        </p:txBody>
-      </p:sp>
-    </p:spTree>
-  </p:cSld>
-</p:sld>
-</file>
-
-<file path=ppt/slides/slide16.xml><?xml version="1.0" encoding="utf-8"?>
-<p:sld xmlns:a="http://schemas.openxmlformats.org/drawingml/2006/main" xmlns:r="http://schemas.openxmlformats.org/officeDocument/2006/relationships" xmlns:p="http://schemas.openxmlformats.org/presentationml/2006/main">
-  <p:cSld>
-    <p:spTree>
-      <p:nvGrpSpPr>
-        <p:cNvPr id="1" name=""/>
-        <p:cNvGrpSpPr/>
-        <p:nvPr/>
-      </p:nvGrpSpPr>
-      <p:grpSpPr>
-        <a:xfrm>
-          <a:off x="0" y="0"/>
-          <a:ext cx="0" cy="0"/>
-          <a:chOff x="0" y="0"/>
-          <a:chExt cx="0" cy="0"/>
-        </a:xfrm>
-      </p:grpSpPr>
-      <p:sp>
-        <p:nvSpPr>
-          <p:cNvPr id="2" name="Title 1"/>
-          <p:cNvSpPr>
-            <a:spLocks noGrp="1"/>
-          </p:cNvSpPr>
-          <p:nvPr>
-            <p:ph type="title"/>
-          </p:nvPr>
-        </p:nvSpPr>
-        <p:spPr/>
-        <p:txBody>
-          <a:bodyPr/>
-          <a:lstStyle/>
-          <a:p>
-            <a:pPr lvl="0" indent="0" marL="0">
-              <a:buNone/>
-            </a:pPr>
-            <a:r>
-              <a:rPr/>
-              <a:t>Discrete traits — mapping presence/absence</a:t>
-            </a:r>
-          </a:p>
-        </p:txBody>
-      </p:sp>
-      <p:sp>
-        <p:nvSpPr>
-          <p:cNvPr id="3" name="Content Placeholder 2"/>
-          <p:cNvSpPr>
-            <a:spLocks noGrp="1"/>
-          </p:cNvSpPr>
-          <p:nvPr>
-            <p:ph idx="1"/>
-          </p:nvPr>
-        </p:nvSpPr>
-        <p:spPr/>
-        <p:txBody>
-          <a:bodyPr/>
-          <a:lstStyle/>
-          <a:p>
-            <a:pPr lvl="0" indent="0" marL="0">
-              <a:buNone/>
-            </a:pPr>
-            <a:r>
-              <a:rPr/>
-              <a:t>Not all traits are continuous. Some are </a:t>
-            </a:r>
-            <a:r>
-              <a:rPr b="1"/>
-              <a:t>binary</a:t>
-            </a:r>
-            <a:r>
-              <a:rPr/>
-              <a:t>: the species either has it or doesn’t.</a:t>
-            </a:r>
-          </a:p>
-          <a:p>
-            <a:pPr lvl="0" indent="0" marL="0">
-              <a:buNone/>
-            </a:pPr>
-            <a:r>
-              <a:rPr b="1"/>
-              <a:t>Example: trunk marbling</a:t>
-            </a:r>
-            <a:r>
-              <a:rPr/>
-              <a:t> (irregular worm-like markings)</a:t>
-            </a:r>
-          </a:p>
-        </p:txBody>
-      </p:sp>
-    </p:spTree>
-  </p:cSld>
-</p:sld>
-</file>
-
-<file path=ppt/slides/slide17.xml><?xml version="1.0" encoding="utf-8"?>
-<p:sld xmlns:a="http://schemas.openxmlformats.org/drawingml/2006/main" xmlns:r="http://schemas.openxmlformats.org/officeDocument/2006/relationships" xmlns:p="http://schemas.openxmlformats.org/presentationml/2006/main">
-  <p:cSld>
-    <p:spTree>
-      <p:nvGrpSpPr>
-        <p:cNvPr id="1" name=""/>
-        <p:cNvGrpSpPr/>
-        <p:nvPr/>
-      </p:nvGrpSpPr>
-      <p:grpSpPr>
-        <a:xfrm>
-          <a:off x="0" y="0"/>
-          <a:ext cx="0" cy="0"/>
-          <a:chOff x="0" y="0"/>
-          <a:chExt cx="0" cy="0"/>
-        </a:xfrm>
-      </p:grpSpPr>
-      <p:sp>
-        <p:nvSpPr>
-          <p:cNvPr id="3" name="Content Placeholder 2"/>
-          <p:cNvSpPr>
-            <a:spLocks noGrp="1"/>
-          </p:cNvSpPr>
-          <p:nvPr>
-            <p:ph idx="1" sz="half"/>
-          </p:nvPr>
-        </p:nvSpPr>
-        <p:spPr/>
-        <p:txBody>
-          <a:bodyPr/>
-          <a:lstStyle/>
-          <a:p>
-            <a:pPr lvl="0"/>
-            <a:r>
-              <a:rPr/>
-              <a:t>17 of 62 species have trunk marbling</a:t>
-            </a:r>
-          </a:p>
-          <a:p>
-            <a:pPr lvl="0"/>
-            <a:r>
-              <a:rPr/>
-              <a:t>Concentrated in </a:t>
-            </a:r>
-            <a:r>
-              <a:rPr i="1"/>
-              <a:t>Acanthurus</a:t>
-            </a:r>
-            <a:r>
-              <a:rPr/>
-              <a:t> (11/26) and </a:t>
-            </a:r>
-            <a:r>
-              <a:rPr i="1"/>
-              <a:t>Ctenochaetus</a:t>
-            </a:r>
-            <a:r>
-              <a:rPr/>
-              <a:t> (3/6)</a:t>
-            </a:r>
-          </a:p>
-          <a:p>
-            <a:pPr lvl="0"/>
-            <a:r>
-              <a:rPr/>
-              <a:t>Absent in </a:t>
-            </a:r>
-            <a:r>
-              <a:rPr i="1"/>
-              <a:t>Zebrasoma</a:t>
-            </a:r>
-            <a:r>
-              <a:rPr/>
-              <a:t>, </a:t>
-            </a:r>
-            <a:r>
-              <a:rPr i="1"/>
-              <a:t>Prionurus</a:t>
-            </a:r>
-            <a:r>
-              <a:rPr/>
-              <a:t>, </a:t>
-            </a:r>
-            <a:r>
-              <a:rPr i="1"/>
-              <a:t>Paracanthurus</a:t>
-            </a:r>
-          </a:p>
-        </p:txBody>
-      </p:sp>
-      <p:sp>
-        <p:nvSpPr>
-          <p:cNvPr id="4" name="Content Placeholder 3"/>
-          <p:cNvSpPr>
-            <a:spLocks noGrp="1"/>
-          </p:cNvSpPr>
-          <p:nvPr>
-            <p:ph idx="2" sz="half"/>
-          </p:nvPr>
-        </p:nvSpPr>
-        <p:spPr/>
-        <p:txBody>
-          <a:bodyPr/>
-          <a:lstStyle/>
-          <a:p>
-            <a:pPr lvl="0" indent="0" marL="0">
-              <a:buNone/>
-            </a:pPr>
-            <a:r>
-              <a:rPr b="1"/>
-              <a:t>Discussion question:</a:t>
-            </a:r>
-          </a:p>
-          <a:p>
-            <a:pPr lvl="0" indent="0" marL="0">
-              <a:buNone/>
-            </a:pPr>
-            <a:r>
-              <a:rPr/>
-              <a:t>Is marbling a Turing pattern?</a:t>
-            </a:r>
-          </a:p>
-          <a:p>
-            <a:pPr lvl="0" indent="0" marL="0">
-              <a:buNone/>
-            </a:pPr>
-            <a:r>
-              <a:rPr/>
-              <a:t>Think back to Lecture 12 — reaction-diffusion produces labyrinthine patterns that look a lot like “marbling.”</a:t>
-            </a:r>
-          </a:p>
-        </p:txBody>
-      </p:sp>
-    </p:spTree>
-  </p:cSld>
-</p:sld>
-</file>
-
 <file path=ppt/slides/slide18.xml><?xml version="1.0" encoding="utf-8"?>
 <p:sld xmlns:a="http://schemas.openxmlformats.org/drawingml/2006/main" xmlns:r="http://schemas.openxmlformats.org/officeDocument/2006/relationships" xmlns:p="http://schemas.openxmlformats.org/presentationml/2006/main">
   <p:cSld>
@@ -4194,7 +4275,50 @@
             </a:pPr>
             <a:r>
               <a:rPr/>
-              <a:t>You’ll color tree tips by marbling presence and ask: how many times did it evolve?</a:t>
+              <a:t>The </a:t>
+            </a:r>
+            <a:r>
+              <a:rPr b="1"/>
+              <a:t>p-value</a:t>
+            </a:r>
+            <a:r>
+              <a:rPr/>
+              <a:t> tells you if the signal is statistically significant:</a:t>
+            </a:r>
+          </a:p>
+          <a:p>
+            <a:pPr lvl="0"/>
+            <a:r>
+              <a:rPr b="1"/>
+              <a:t>p &lt; 0.05</a:t>
+            </a:r>
+            <a:r>
+              <a:rPr/>
+              <a:t> → yes, there’s real signal</a:t>
+            </a:r>
+          </a:p>
+          <a:p>
+            <a:pPr lvl="0"/>
+            <a:r>
+              <a:rPr b="1"/>
+              <a:t>p &gt; 0.05</a:t>
+            </a:r>
+            <a:r>
+              <a:rPr/>
+              <a:t> → can’t distinguish from random</a:t>
+            </a:r>
+          </a:p>
+          <a:p>
+            <a:pPr lvl="0" indent="0" marL="0">
+              <a:buNone/>
+            </a:pPr>
+            <a:r>
+              <a:rPr b="1"/>
+              <a:t>K = 0.16 with p = 0.04</a:t>
+            </a:r>
+            <a:r>
+              <a:rPr/>
+              <a:t> → “there IS signal, but it’s modest — color patterns show some phylogenetic conservatism but also a lot of independent change”</a:t>
             </a:r>
           </a:p>
         </p:txBody>
@@ -4205,6 +4329,599 @@
 </file>
 
 <file path=ppt/slides/slide19.xml><?xml version="1.0" encoding="utf-8"?>
+<p:sld xmlns:a="http://schemas.openxmlformats.org/drawingml/2006/main" xmlns:r="http://schemas.openxmlformats.org/officeDocument/2006/relationships" xmlns:p="http://schemas.openxmlformats.org/presentationml/2006/main">
+  <p:cSld>
+    <p:spTree>
+      <p:nvGrpSpPr>
+        <p:cNvPr id="1" name=""/>
+        <p:cNvGrpSpPr/>
+        <p:nvPr/>
+      </p:nvGrpSpPr>
+      <p:grpSpPr>
+        <a:xfrm>
+          <a:off x="0" y="0"/>
+          <a:ext cx="0" cy="0"/>
+          <a:chOff x="0" y="0"/>
+          <a:chExt cx="0" cy="0"/>
+        </a:xfrm>
+      </p:grpSpPr>
+      <p:sp>
+        <p:nvSpPr>
+          <p:cNvPr id="2" name="Title 1"/>
+          <p:cNvSpPr>
+            <a:spLocks noGrp="1"/>
+          </p:cNvSpPr>
+          <p:nvPr>
+            <p:ph type="title"/>
+          </p:nvPr>
+        </p:nvSpPr>
+        <p:spPr/>
+        <p:txBody>
+          <a:bodyPr/>
+          <a:lstStyle/>
+          <a:p>
+            <a:pPr lvl="0" indent="0" marL="0">
+              <a:buNone/>
+            </a:pPr>
+            <a:r>
+              <a:rPr/>
+              <a:t>contMap — painting traits on the tree</a:t>
+            </a:r>
+          </a:p>
+        </p:txBody>
+      </p:sp>
+      <p:sp>
+        <p:nvSpPr>
+          <p:cNvPr id="3" name="Content Placeholder 2"/>
+          <p:cNvSpPr>
+            <a:spLocks noGrp="1"/>
+          </p:cNvSpPr>
+          <p:nvPr>
+            <p:ph idx="1"/>
+          </p:nvPr>
+        </p:nvSpPr>
+        <p:spPr/>
+        <p:txBody>
+          <a:bodyPr/>
+          <a:lstStyle/>
+          <a:p>
+            <a:pPr lvl="0" indent="0" marL="0">
+              <a:buNone/>
+            </a:pPr>
+            <a:r>
+              <a:rPr b="1"/>
+              <a:t>contMap</a:t>
+            </a:r>
+            <a:r>
+              <a:rPr/>
+              <a:t> reconstructs ancestral trait values and paints them along every branch.</a:t>
+            </a:r>
+          </a:p>
+        </p:txBody>
+      </p:sp>
+    </p:spTree>
+  </p:cSld>
+</p:sld>
+</file>
+
+<file path=ppt/slides/slide2.xml><?xml version="1.0" encoding="utf-8"?>
+<p:sld xmlns:a="http://schemas.openxmlformats.org/drawingml/2006/main" xmlns:r="http://schemas.openxmlformats.org/officeDocument/2006/relationships" xmlns:p="http://schemas.openxmlformats.org/presentationml/2006/main">
+  <p:cSld>
+    <p:spTree>
+      <p:nvGrpSpPr>
+        <p:cNvPr id="1" name=""/>
+        <p:cNvGrpSpPr/>
+        <p:nvPr/>
+      </p:nvGrpSpPr>
+      <p:grpSpPr>
+        <a:xfrm>
+          <a:off x="0" y="0"/>
+          <a:ext cx="0" cy="0"/>
+          <a:chOff x="0" y="0"/>
+          <a:chExt cx="0" cy="0"/>
+        </a:xfrm>
+      </p:grpSpPr>
+      <p:sp>
+        <p:nvSpPr>
+          <p:cNvPr id="2" name="Title 1"/>
+          <p:cNvSpPr>
+            <a:spLocks noGrp="1"/>
+          </p:cNvSpPr>
+          <p:nvPr>
+            <p:ph type="title"/>
+          </p:nvPr>
+        </p:nvSpPr>
+        <p:spPr/>
+        <p:txBody>
+          <a:bodyPr/>
+          <a:lstStyle/>
+          <a:p>
+            <a:pPr lvl="0" indent="0" marL="0">
+              <a:buNone/>
+            </a:pPr>
+            <a:r>
+              <a:rPr/>
+              <a:t>Today’s big question</a:t>
+            </a:r>
+          </a:p>
+        </p:txBody>
+      </p:sp>
+      <p:sp>
+        <p:nvSpPr>
+          <p:cNvPr id="3" name="Content Placeholder 2"/>
+          <p:cNvSpPr>
+            <a:spLocks noGrp="1"/>
+          </p:cNvSpPr>
+          <p:nvPr>
+            <p:ph idx="1"/>
+          </p:nvPr>
+        </p:nvSpPr>
+        <p:spPr/>
+        <p:txBody>
+          <a:bodyPr/>
+          <a:lstStyle/>
+          <a:p>
+            <a:pPr lvl="0" indent="0" marL="0">
+              <a:buNone/>
+            </a:pPr>
+            <a:r>
+              <a:rPr b="1"/>
+              <a:t>Do closely related fish species have similar color patterns?</a:t>
+            </a:r>
+          </a:p>
+          <a:p>
+            <a:pPr lvl="0" indent="0" marL="0">
+              <a:buNone/>
+            </a:pPr>
+            <a:r>
+              <a:rPr/>
+              <a:t>Or does natural selection override evolutionary history?</a:t>
+            </a:r>
+          </a:p>
+          <a:p>
+            <a:pPr lvl="0" indent="0" marL="0">
+              <a:buNone/>
+            </a:pPr>
+            <a:r>
+              <a:rPr/>
+              <a:t>We’ll answer this with data, a phylogeny, and two statistical tests.</a:t>
+            </a:r>
+          </a:p>
+        </p:txBody>
+      </p:sp>
+    </p:spTree>
+  </p:cSld>
+</p:sld>
+</file>
+
+<file path=ppt/slides/slide20.xml><?xml version="1.0" encoding="utf-8"?>
+<p:sld xmlns:a="http://schemas.openxmlformats.org/drawingml/2006/main" xmlns:r="http://schemas.openxmlformats.org/officeDocument/2006/relationships" xmlns:p="http://schemas.openxmlformats.org/presentationml/2006/main">
+  <p:cSld>
+    <p:spTree>
+      <p:nvGrpSpPr>
+        <p:cNvPr id="1" name=""/>
+        <p:cNvGrpSpPr/>
+        <p:nvPr/>
+      </p:nvGrpSpPr>
+      <p:grpSpPr>
+        <a:xfrm>
+          <a:off x="0" y="0"/>
+          <a:ext cx="0" cy="0"/>
+          <a:chOff x="0" y="0"/>
+          <a:chExt cx="0" cy="0"/>
+        </a:xfrm>
+      </p:grpSpPr>
+      <p:sp>
+        <p:nvSpPr>
+          <p:cNvPr id="3" name="Content Placeholder 2"/>
+          <p:cNvSpPr>
+            <a:spLocks noGrp="1"/>
+          </p:cNvSpPr>
+          <p:nvPr>
+            <p:ph idx="1" sz="half"/>
+          </p:nvPr>
+        </p:nvSpPr>
+        <p:spPr/>
+        <p:txBody>
+          <a:bodyPr/>
+          <a:lstStyle/>
+          <a:p>
+            <a:pPr lvl="0"/>
+            <a:r>
+              <a:rPr/>
+              <a:t>Cool colors (blue) = </a:t>
+            </a:r>
+            <a:r>
+              <a:rPr b="1"/>
+              <a:t>simple</a:t>
+            </a:r>
+            <a:r>
+              <a:rPr/>
+              <a:t> patterns</a:t>
+            </a:r>
+          </a:p>
+          <a:p>
+            <a:pPr lvl="0"/>
+            <a:r>
+              <a:rPr/>
+              <a:t>Warm colors (red) = </a:t>
+            </a:r>
+            <a:r>
+              <a:rPr b="1"/>
+              <a:t>complex</a:t>
+            </a:r>
+            <a:r>
+              <a:rPr/>
+              <a:t> patterns</a:t>
+            </a:r>
+          </a:p>
+          <a:p>
+            <a:pPr lvl="0"/>
+            <a:r>
+              <a:rPr/>
+              <a:t>You can SEE where on the tree complexity changed</a:t>
+            </a:r>
+          </a:p>
+          <a:p>
+            <a:pPr lvl="0"/>
+            <a:r>
+              <a:rPr/>
+              <a:t>Look for </a:t>
+            </a:r>
+            <a:r>
+              <a:rPr b="1"/>
+              <a:t>abrupt shifts</a:t>
+            </a:r>
+            <a:r>
+              <a:rPr/>
+              <a:t> — those are evolutionary events</a:t>
+            </a:r>
+          </a:p>
+        </p:txBody>
+      </p:sp>
+      <p:sp>
+        <p:nvSpPr>
+          <p:cNvPr id="4" name="Content Placeholder 3"/>
+          <p:cNvSpPr>
+            <a:spLocks noGrp="1"/>
+          </p:cNvSpPr>
+          <p:nvPr>
+            <p:ph idx="2" sz="half"/>
+          </p:nvPr>
+        </p:nvSpPr>
+        <p:spPr/>
+        <p:txBody>
+          <a:bodyPr/>
+          <a:lstStyle/>
+          <a:p>
+            <a:pPr lvl="0" indent="0" marL="0">
+              <a:buNone/>
+            </a:pPr>
+            <a:r>
+              <a:rPr/>
+              <a:t>You’ll generate one of these in Section 5 of the worksheet.</a:t>
+            </a:r>
+          </a:p>
+          <a:p>
+            <a:pPr lvl="0" indent="0" marL="0">
+              <a:buNone/>
+            </a:pPr>
+            <a:r>
+              <a:rPr/>
+              <a:t>The most complex species? </a:t>
+            </a:r>
+            <a:r>
+              <a:rPr b="1" i="1"/>
+              <a:t>Acanthurus bariene</a:t>
+            </a:r>
+            <a:r>
+              <a:rPr/>
+              <a:t> — 19 pattern elements!</a:t>
+            </a:r>
+          </a:p>
+          <a:p>
+            <a:pPr lvl="0" indent="0" marL="0">
+              <a:buNone/>
+            </a:pPr>
+            <a:r>
+              <a:rPr/>
+              <a:t>The simplest? </a:t>
+            </a:r>
+            <a:r>
+              <a:rPr b="1" i="1"/>
+              <a:t>Zebrasoma rostratum</a:t>
+            </a:r>
+            <a:r>
+              <a:rPr/>
+              <a:t> — only 4 elements.</a:t>
+            </a:r>
+          </a:p>
+        </p:txBody>
+      </p:sp>
+    </p:spTree>
+  </p:cSld>
+</p:sld>
+</file>
+
+<file path=ppt/slides/slide21.xml><?xml version="1.0" encoding="utf-8"?>
+<p:sld xmlns:a="http://schemas.openxmlformats.org/drawingml/2006/main" xmlns:r="http://schemas.openxmlformats.org/officeDocument/2006/relationships" xmlns:p="http://schemas.openxmlformats.org/presentationml/2006/main">
+  <p:cSld>
+    <p:spTree>
+      <p:nvGrpSpPr>
+        <p:cNvPr id="1" name=""/>
+        <p:cNvGrpSpPr/>
+        <p:nvPr/>
+      </p:nvGrpSpPr>
+      <p:grpSpPr>
+        <a:xfrm>
+          <a:off x="0" y="0"/>
+          <a:ext cx="0" cy="0"/>
+          <a:chOff x="0" y="0"/>
+          <a:chExt cx="0" cy="0"/>
+        </a:xfrm>
+      </p:grpSpPr>
+      <p:sp>
+        <p:nvSpPr>
+          <p:cNvPr id="2" name="Title 1"/>
+          <p:cNvSpPr>
+            <a:spLocks noGrp="1"/>
+          </p:cNvSpPr>
+          <p:nvPr>
+            <p:ph type="title"/>
+          </p:nvPr>
+        </p:nvSpPr>
+        <p:spPr/>
+        <p:txBody>
+          <a:bodyPr/>
+          <a:lstStyle/>
+          <a:p>
+            <a:pPr lvl="0" indent="0" marL="0">
+              <a:buNone/>
+            </a:pPr>
+            <a:r>
+              <a:rPr/>
+              <a:t>Discrete traits — mapping presence/absence</a:t>
+            </a:r>
+          </a:p>
+        </p:txBody>
+      </p:sp>
+      <p:sp>
+        <p:nvSpPr>
+          <p:cNvPr id="3" name="Content Placeholder 2"/>
+          <p:cNvSpPr>
+            <a:spLocks noGrp="1"/>
+          </p:cNvSpPr>
+          <p:nvPr>
+            <p:ph idx="1"/>
+          </p:nvPr>
+        </p:nvSpPr>
+        <p:spPr/>
+        <p:txBody>
+          <a:bodyPr/>
+          <a:lstStyle/>
+          <a:p>
+            <a:pPr lvl="0" indent="0" marL="0">
+              <a:buNone/>
+            </a:pPr>
+            <a:r>
+              <a:rPr/>
+              <a:t>Not all traits are continuous. Some are </a:t>
+            </a:r>
+            <a:r>
+              <a:rPr b="1"/>
+              <a:t>binary</a:t>
+            </a:r>
+            <a:r>
+              <a:rPr/>
+              <a:t>: the species either has it or doesn’t.</a:t>
+            </a:r>
+          </a:p>
+          <a:p>
+            <a:pPr lvl="0" indent="0" marL="0">
+              <a:buNone/>
+            </a:pPr>
+            <a:r>
+              <a:rPr b="1"/>
+              <a:t>Example: trunk marbling</a:t>
+            </a:r>
+            <a:r>
+              <a:rPr/>
+              <a:t> (irregular worm-like markings)</a:t>
+            </a:r>
+          </a:p>
+        </p:txBody>
+      </p:sp>
+    </p:spTree>
+  </p:cSld>
+</p:sld>
+</file>
+
+<file path=ppt/slides/slide22.xml><?xml version="1.0" encoding="utf-8"?>
+<p:sld xmlns:a="http://schemas.openxmlformats.org/drawingml/2006/main" xmlns:r="http://schemas.openxmlformats.org/officeDocument/2006/relationships" xmlns:p="http://schemas.openxmlformats.org/presentationml/2006/main">
+  <p:cSld>
+    <p:spTree>
+      <p:nvGrpSpPr>
+        <p:cNvPr id="1" name=""/>
+        <p:cNvGrpSpPr/>
+        <p:nvPr/>
+      </p:nvGrpSpPr>
+      <p:grpSpPr>
+        <a:xfrm>
+          <a:off x="0" y="0"/>
+          <a:ext cx="0" cy="0"/>
+          <a:chOff x="0" y="0"/>
+          <a:chExt cx="0" cy="0"/>
+        </a:xfrm>
+      </p:grpSpPr>
+      <p:sp>
+        <p:nvSpPr>
+          <p:cNvPr id="3" name="Content Placeholder 2"/>
+          <p:cNvSpPr>
+            <a:spLocks noGrp="1"/>
+          </p:cNvSpPr>
+          <p:nvPr>
+            <p:ph idx="1" sz="half"/>
+          </p:nvPr>
+        </p:nvSpPr>
+        <p:spPr/>
+        <p:txBody>
+          <a:bodyPr/>
+          <a:lstStyle/>
+          <a:p>
+            <a:pPr lvl="0"/>
+            <a:r>
+              <a:rPr/>
+              <a:t>17 of 62 species have trunk marbling</a:t>
+            </a:r>
+          </a:p>
+          <a:p>
+            <a:pPr lvl="0"/>
+            <a:r>
+              <a:rPr/>
+              <a:t>Concentrated in </a:t>
+            </a:r>
+            <a:r>
+              <a:rPr i="1"/>
+              <a:t>Acanthurus</a:t>
+            </a:r>
+            <a:r>
+              <a:rPr/>
+              <a:t> (11/26) and </a:t>
+            </a:r>
+            <a:r>
+              <a:rPr i="1"/>
+              <a:t>Ctenochaetus</a:t>
+            </a:r>
+            <a:r>
+              <a:rPr/>
+              <a:t> (3/6)</a:t>
+            </a:r>
+          </a:p>
+          <a:p>
+            <a:pPr lvl="0"/>
+            <a:r>
+              <a:rPr/>
+              <a:t>Absent in </a:t>
+            </a:r>
+            <a:r>
+              <a:rPr i="1"/>
+              <a:t>Zebrasoma</a:t>
+            </a:r>
+            <a:r>
+              <a:rPr/>
+              <a:t>, </a:t>
+            </a:r>
+            <a:r>
+              <a:rPr i="1"/>
+              <a:t>Prionurus</a:t>
+            </a:r>
+            <a:r>
+              <a:rPr/>
+              <a:t>, </a:t>
+            </a:r>
+            <a:r>
+              <a:rPr i="1"/>
+              <a:t>Paracanthurus</a:t>
+            </a:r>
+          </a:p>
+        </p:txBody>
+      </p:sp>
+      <p:sp>
+        <p:nvSpPr>
+          <p:cNvPr id="4" name="Content Placeholder 3"/>
+          <p:cNvSpPr>
+            <a:spLocks noGrp="1"/>
+          </p:cNvSpPr>
+          <p:nvPr>
+            <p:ph idx="2" sz="half"/>
+          </p:nvPr>
+        </p:nvSpPr>
+        <p:spPr/>
+        <p:txBody>
+          <a:bodyPr/>
+          <a:lstStyle/>
+          <a:p>
+            <a:pPr lvl="0" indent="0" marL="0">
+              <a:buNone/>
+            </a:pPr>
+            <a:r>
+              <a:rPr b="1"/>
+              <a:t>Discussion question:</a:t>
+            </a:r>
+          </a:p>
+          <a:p>
+            <a:pPr lvl="0" indent="0" marL="0">
+              <a:buNone/>
+            </a:pPr>
+            <a:r>
+              <a:rPr/>
+              <a:t>Is marbling a Turing pattern?</a:t>
+            </a:r>
+          </a:p>
+          <a:p>
+            <a:pPr lvl="0" indent="0" marL="0">
+              <a:buNone/>
+            </a:pPr>
+            <a:r>
+              <a:rPr/>
+              <a:t>Think back to Lecture 12 — reaction-diffusion produces labyrinthine patterns that look a lot like “marbling.”</a:t>
+            </a:r>
+          </a:p>
+        </p:txBody>
+      </p:sp>
+    </p:spTree>
+  </p:cSld>
+</p:sld>
+</file>
+
+<file path=ppt/slides/slide23.xml><?xml version="1.0" encoding="utf-8"?>
+<p:sld xmlns:a="http://schemas.openxmlformats.org/drawingml/2006/main" xmlns:r="http://schemas.openxmlformats.org/officeDocument/2006/relationships" xmlns:p="http://schemas.openxmlformats.org/presentationml/2006/main">
+  <p:cSld>
+    <p:spTree>
+      <p:nvGrpSpPr>
+        <p:cNvPr id="1" name=""/>
+        <p:cNvGrpSpPr/>
+        <p:nvPr/>
+      </p:nvGrpSpPr>
+      <p:grpSpPr>
+        <a:xfrm>
+          <a:off x="0" y="0"/>
+          <a:ext cx="0" cy="0"/>
+          <a:chOff x="0" y="0"/>
+          <a:chExt cx="0" cy="0"/>
+        </a:xfrm>
+      </p:grpSpPr>
+      <p:sp>
+        <p:nvSpPr>
+          <p:cNvPr id="3" name="Content Placeholder 2"/>
+          <p:cNvSpPr>
+            <a:spLocks noGrp="1"/>
+          </p:cNvSpPr>
+          <p:nvPr>
+            <p:ph idx="1"/>
+          </p:nvPr>
+        </p:nvSpPr>
+        <p:spPr/>
+        <p:txBody>
+          <a:bodyPr/>
+          <a:lstStyle/>
+          <a:p>
+            <a:pPr lvl="0" indent="0" marL="0">
+              <a:buNone/>
+            </a:pPr>
+            <a:r>
+              <a:rPr/>
+              <a:t>You’ll color tree tips by marbling presence and ask: how many times did it evolve?</a:t>
+            </a:r>
+          </a:p>
+        </p:txBody>
+      </p:sp>
+    </p:spTree>
+  </p:cSld>
+</p:sld>
+</file>
+
+<file path=ppt/slides/slide24.xml><?xml version="1.0" encoding="utf-8"?>
 <p:sld xmlns:a="http://schemas.openxmlformats.org/drawingml/2006/main" xmlns:r="http://schemas.openxmlformats.org/officeDocument/2006/relationships" xmlns:p="http://schemas.openxmlformats.org/presentationml/2006/main">
   <p:cSld>
     <p:spTree>
@@ -4843,7 +5560,7 @@
 </p:sld>
 </file>
 
-<file path=ppt/slides/slide2.xml><?xml version="1.0" encoding="utf-8"?>
+<file path=ppt/slides/slide25.xml><?xml version="1.0" encoding="utf-8"?>
 <p:sld xmlns:a="http://schemas.openxmlformats.org/drawingml/2006/main" xmlns:r="http://schemas.openxmlformats.org/officeDocument/2006/relationships" xmlns:p="http://schemas.openxmlformats.org/presentationml/2006/main">
   <p:cSld>
     <p:spTree>
@@ -4862,12 +5579,12 @@
       </p:grpSpPr>
       <p:sp>
         <p:nvSpPr>
-          <p:cNvPr id="2" name="Title 1"/>
-          <p:cNvSpPr>
-            <a:spLocks noGrp="1"/>
-          </p:cNvSpPr>
-          <p:nvPr>
-            <p:ph type="title"/>
+          <p:cNvPr id="3" name="Content Placeholder 2"/>
+          <p:cNvSpPr>
+            <a:spLocks noGrp="1"/>
+          </p:cNvSpPr>
+          <p:nvPr>
+            <p:ph idx="1"/>
           </p:nvPr>
         </p:nvSpPr>
         <p:spPr/>
@@ -4879,51 +5596,8 @@
               <a:buNone/>
             </a:pPr>
             <a:r>
-              <a:rPr/>
-              <a:t>Today’s big question</a:t>
-            </a:r>
-          </a:p>
-        </p:txBody>
-      </p:sp>
-      <p:sp>
-        <p:nvSpPr>
-          <p:cNvPr id="3" name="Content Placeholder 2"/>
-          <p:cNvSpPr>
-            <a:spLocks noGrp="1"/>
-          </p:cNvSpPr>
-          <p:nvPr>
-            <p:ph idx="1"/>
-          </p:nvPr>
-        </p:nvSpPr>
-        <p:spPr/>
-        <p:txBody>
-          <a:bodyPr/>
-          <a:lstStyle/>
-          <a:p>
-            <a:pPr lvl="0" indent="0" marL="0">
-              <a:buNone/>
-            </a:pPr>
-            <a:r>
               <a:rPr b="1"/>
-              <a:t>Do closely related fish species have similar color patterns?</a:t>
-            </a:r>
-          </a:p>
-          <a:p>
-            <a:pPr lvl="0" indent="0" marL="0">
-              <a:buNone/>
-            </a:pPr>
-            <a:r>
-              <a:rPr/>
-              <a:t>Or does natural selection override evolutionary history?</a:t>
-            </a:r>
-          </a:p>
-          <a:p>
-            <a:pPr lvl="0" indent="0" marL="0">
-              <a:buNone/>
-            </a:pPr>
-            <a:r>
-              <a:rPr/>
-              <a:t>We’ll answer this with data, a phylogeny, and two statistical tests.</a:t>
+              <a:t>~60 minutes of guided work, then 15 minutes on your own</a:t>
             </a:r>
           </a:p>
         </p:txBody>
@@ -4933,7 +5607,7 @@
 </p:sld>
 </file>
 
-<file path=ppt/slides/slide20.xml><?xml version="1.0" encoding="utf-8"?>
+<file path=ppt/slides/slide26.xml><?xml version="1.0" encoding="utf-8"?>
 <p:sld xmlns:a="http://schemas.openxmlformats.org/drawingml/2006/main" xmlns:r="http://schemas.openxmlformats.org/officeDocument/2006/relationships" xmlns:p="http://schemas.openxmlformats.org/presentationml/2006/main">
   <p:cSld>
     <p:spTree>
@@ -4952,6 +5626,31 @@
       </p:grpSpPr>
       <p:sp>
         <p:nvSpPr>
+          <p:cNvPr id="2" name="Title 1"/>
+          <p:cNvSpPr>
+            <a:spLocks noGrp="1"/>
+          </p:cNvSpPr>
+          <p:nvPr>
+            <p:ph type="title"/>
+          </p:nvPr>
+        </p:nvSpPr>
+        <p:spPr/>
+        <p:txBody>
+          <a:bodyPr/>
+          <a:lstStyle/>
+          <a:p>
+            <a:pPr lvl="0" indent="0" marL="0">
+              <a:buNone/>
+            </a:pPr>
+            <a:r>
+              <a:rPr/>
+              <a:t>What you’ll turn in</a:t>
+            </a:r>
+          </a:p>
+        </p:txBody>
+      </p:sp>
+      <p:sp>
+        <p:nvSpPr>
           <p:cNvPr id="3" name="Content Placeholder 2"/>
           <p:cNvSpPr>
             <a:spLocks noGrp="1"/>
@@ -4965,12 +5664,72 @@
           <a:bodyPr/>
           <a:lstStyle/>
           <a:p>
+            <a:pPr lvl="0" indent="-342900" marL="342900">
+              <a:buAutoNum type="arabicPeriod"/>
+            </a:pPr>
+            <a:r>
+              <a:rPr b="1"/>
+              <a:t>Screenshot</a:t>
+            </a:r>
+            <a:r>
+              <a:rPr/>
+              <a:t> of your contMap (pattern complexity on the tree)</a:t>
+            </a:r>
+          </a:p>
+          <a:p>
+            <a:pPr lvl="0" indent="-342900" marL="342900">
+              <a:buAutoNum type="arabicPeriod"/>
+            </a:pPr>
+            <a:r>
+              <a:rPr b="1"/>
+              <a:t>Your K and λ values</a:t>
+            </a:r>
+            <a:r>
+              <a:rPr/>
+              <a:t> with a one-sentence interpretation each</a:t>
+            </a:r>
+          </a:p>
+          <a:p>
+            <a:pPr lvl="0" indent="-342900" marL="342900">
+              <a:buAutoNum type="arabicPeriod"/>
+            </a:pPr>
+            <a:r>
+              <a:rPr b="1"/>
+              <a:t>Your chosen trait</a:t>
+            </a:r>
+            <a:r>
+              <a:rPr/>
+              <a:t> from “Your Turn” — which trait did you pick? What was K? Was it significant?</a:t>
+            </a:r>
+          </a:p>
+          <a:p>
+            <a:pPr lvl="0" indent="-342900" marL="342900">
+              <a:buAutoNum type="arabicPeriod"/>
+            </a:pPr>
+            <a:r>
+              <a:rPr b="1"/>
+              <a:t>One paragraph</a:t>
+            </a:r>
+            <a:r>
+              <a:rPr/>
+              <a:t>: “Is color pattern diversity phylogenetically conserved in surgeonfishes? Why or why not?”</a:t>
+            </a:r>
+          </a:p>
+          <a:p>
             <a:pPr lvl="0" indent="0" marL="0">
               <a:buNone/>
             </a:pPr>
             <a:r>
+              <a:rPr/>
+              <a:t>There is no single “right answer” — we want a </a:t>
+            </a:r>
+            <a:r>
               <a:rPr b="1"/>
-              <a:t>~60 minutes of guided work, then 15 minutes on your own</a:t>
+              <a:t>nuanced</a:t>
+            </a:r>
+            <a:r>
+              <a:rPr/>
+              <a:t> interpretation backed by your data.</a:t>
             </a:r>
           </a:p>
         </p:txBody>
@@ -4980,139 +5739,7 @@
 </p:sld>
 </file>
 
-<file path=ppt/slides/slide21.xml><?xml version="1.0" encoding="utf-8"?>
-<p:sld xmlns:a="http://schemas.openxmlformats.org/drawingml/2006/main" xmlns:r="http://schemas.openxmlformats.org/officeDocument/2006/relationships" xmlns:p="http://schemas.openxmlformats.org/presentationml/2006/main">
-  <p:cSld>
-    <p:spTree>
-      <p:nvGrpSpPr>
-        <p:cNvPr id="1" name=""/>
-        <p:cNvGrpSpPr/>
-        <p:nvPr/>
-      </p:nvGrpSpPr>
-      <p:grpSpPr>
-        <a:xfrm>
-          <a:off x="0" y="0"/>
-          <a:ext cx="0" cy="0"/>
-          <a:chOff x="0" y="0"/>
-          <a:chExt cx="0" cy="0"/>
-        </a:xfrm>
-      </p:grpSpPr>
-      <p:sp>
-        <p:nvSpPr>
-          <p:cNvPr id="2" name="Title 1"/>
-          <p:cNvSpPr>
-            <a:spLocks noGrp="1"/>
-          </p:cNvSpPr>
-          <p:nvPr>
-            <p:ph type="title"/>
-          </p:nvPr>
-        </p:nvSpPr>
-        <p:spPr/>
-        <p:txBody>
-          <a:bodyPr/>
-          <a:lstStyle/>
-          <a:p>
-            <a:pPr lvl="0" indent="0" marL="0">
-              <a:buNone/>
-            </a:pPr>
-            <a:r>
-              <a:rPr/>
-              <a:t>What you’ll turn in</a:t>
-            </a:r>
-          </a:p>
-        </p:txBody>
-      </p:sp>
-      <p:sp>
-        <p:nvSpPr>
-          <p:cNvPr id="3" name="Content Placeholder 2"/>
-          <p:cNvSpPr>
-            <a:spLocks noGrp="1"/>
-          </p:cNvSpPr>
-          <p:nvPr>
-            <p:ph idx="1"/>
-          </p:nvPr>
-        </p:nvSpPr>
-        <p:spPr/>
-        <p:txBody>
-          <a:bodyPr/>
-          <a:lstStyle/>
-          <a:p>
-            <a:pPr lvl="0" indent="-342900" marL="342900">
-              <a:buAutoNum type="arabicPeriod"/>
-            </a:pPr>
-            <a:r>
-              <a:rPr b="1"/>
-              <a:t>Screenshot</a:t>
-            </a:r>
-            <a:r>
-              <a:rPr/>
-              <a:t> of your contMap (pattern complexity on the tree)</a:t>
-            </a:r>
-          </a:p>
-          <a:p>
-            <a:pPr lvl="0" indent="-342900" marL="342900">
-              <a:buAutoNum type="arabicPeriod"/>
-            </a:pPr>
-            <a:r>
-              <a:rPr b="1"/>
-              <a:t>Your K and λ values</a:t>
-            </a:r>
-            <a:r>
-              <a:rPr/>
-              <a:t> with a one-sentence interpretation each</a:t>
-            </a:r>
-          </a:p>
-          <a:p>
-            <a:pPr lvl="0" indent="-342900" marL="342900">
-              <a:buAutoNum type="arabicPeriod"/>
-            </a:pPr>
-            <a:r>
-              <a:rPr b="1"/>
-              <a:t>Your chosen trait</a:t>
-            </a:r>
-            <a:r>
-              <a:rPr/>
-              <a:t> from “Your Turn” — which trait did you pick? What was K? Was it significant?</a:t>
-            </a:r>
-          </a:p>
-          <a:p>
-            <a:pPr lvl="0" indent="-342900" marL="342900">
-              <a:buAutoNum type="arabicPeriod"/>
-            </a:pPr>
-            <a:r>
-              <a:rPr b="1"/>
-              <a:t>One paragraph</a:t>
-            </a:r>
-            <a:r>
-              <a:rPr/>
-              <a:t>: “Is color pattern diversity phylogenetically conserved in surgeonfishes? Why or why not?”</a:t>
-            </a:r>
-          </a:p>
-          <a:p>
-            <a:pPr lvl="0" indent="0" marL="0">
-              <a:buNone/>
-            </a:pPr>
-            <a:r>
-              <a:rPr/>
-              <a:t>There is no single “right answer” — we want a </a:t>
-            </a:r>
-            <a:r>
-              <a:rPr b="1"/>
-              <a:t>nuanced</a:t>
-            </a:r>
-            <a:r>
-              <a:rPr/>
-              <a:t> interpretation backed by your data.</a:t>
-            </a:r>
-          </a:p>
-        </p:txBody>
-      </p:sp>
-    </p:spTree>
-  </p:cSld>
-</p:sld>
-</file>
-
-<file path=ppt/slides/slide22.xml><?xml version="1.0" encoding="utf-8"?>
+<file path=ppt/slides/slide27.xml><?xml version="1.0" encoding="utf-8"?>
 <p:sld xmlns:a="http://schemas.openxmlformats.org/drawingml/2006/main" xmlns:r="http://schemas.openxmlformats.org/officeDocument/2006/relationships" xmlns:p="http://schemas.openxmlformats.org/presentationml/2006/main">
   <p:cSld>
     <p:spTree>
@@ -5524,7 +6151,7 @@
             </a:pPr>
             <a:r>
               <a:rPr/>
-              <a:t>Where the data comes from — Frederich et al. 2026</a:t>
+              <a:t>Frédérich et al. 2026 — the paper at a glance</a:t>
             </a:r>
           </a:p>
         </p:txBody>
@@ -5544,25 +6171,36 @@
           <a:bodyPr/>
           <a:lstStyle/>
           <a:p>
-            <a:pPr lvl="0" indent="0" marL="1270000">
-              <a:buNone/>
-            </a:pPr>
-            <a:r>
-              <a:rPr sz="2000" b="1"/>
-              <a:t>Rapid and repeated evolution of the pigmentation patterns in reef fishes</a:t>
-            </a:r>
-            <a:r>
-              <a:rPr sz="2000"/>
-              <a:t> Frederich, Mittelheiser, Gillet, Hodge &amp; Laudet · </a:t>
-            </a:r>
-            <a:r>
-              <a:rPr sz="2000" i="1"/>
+            <a:pPr lvl="0" indent="0" marL="0">
+              <a:buNone/>
+            </a:pPr>
+            <a:r>
+              <a:rPr b="1"/>
+              <a:t>Rapid and repeated evolution of pigmentation patterns in reef fishes.</a:t>
+            </a:r>
+            <a:r>
+              <a:rPr/>
+              <a:t> Frédérich, Mittelheiser, Gillet, Hodge, Laudet &amp; Dornburg. </a:t>
+            </a:r>
+            <a:r>
+              <a:rPr i="1"/>
               <a:t>BMC Biology</a:t>
             </a:r>
             <a:r>
-              <a:rPr sz="2000"/>
-              <a:t> 2026</a:t>
-            </a:r>
+              <a:rPr/>
+              <a:t> (2026) 24:46. </a:t>
+            </a:r>
+            <a:r>
+              <a:rPr>
+                <a:hlinkClick r:id="rId2"/>
+              </a:rPr>
+              <a:t>https://doi.org/10.1186/s12915-026-02544-4</a:t>
+            </a:r>
+          </a:p>
+          <a:p>
+            <a:pPr lvl="0" indent="0" marL="0">
+              <a:buNone/>
+            </a:pPr>
           </a:p>
         </p:txBody>
       </p:sp>
@@ -5608,122 +6246,94 @@
             </a:pPr>
             <a:r>
               <a:rPr b="1"/>
-              <a:t>What they did</a:t>
+              <a:t>The scope</a:t>
             </a:r>
           </a:p>
           <a:p>
             <a:pPr lvl="0"/>
-            <a:r>
-              <a:rPr/>
-              <a:t>Scored </a:t>
-            </a:r>
             <a:r>
               <a:rPr b="1"/>
               <a:t>6 reef-fish families</a:t>
             </a:r>
-            <a:r>
-              <a:rPr/>
-              <a:t> (Acanthuridae, Chaetodontidae, Lutjanidae, Mullidae, Pomacanthidae, Pomacentridae)</a:t>
-            </a:r>
           </a:p>
           <a:p>
             <a:pPr lvl="0"/>
             <a:r>
-              <a:rPr/>
-              <a:t>For every species: </a:t>
-            </a:r>
-            <a:r>
               <a:rPr b="1"/>
-              <a:t>57 binary characters</a:t>
-            </a:r>
-            <a:r>
-              <a:rPr/>
-              <a:t> describing the pigmentation pattern (1 = present, 0 = absent)</a:t>
+              <a:t>918 species</a:t>
+            </a:r>
+            <a:r>
+              <a:rPr/>
+              <a:t> total</a:t>
             </a:r>
           </a:p>
           <a:p>
             <a:pPr lvl="0"/>
             <a:r>
-              <a:rPr/>
-              <a:t>Computed Gower distance → PCoA → quantified pattern diversity through time and across regions</a:t>
+              <a:rPr b="1"/>
+              <a:t>75%+</a:t>
+            </a:r>
+            <a:r>
+              <a:rPr/>
+              <a:t> of extant diversity in every family</a:t>
+            </a:r>
+          </a:p>
+        </p:txBody>
+      </p:sp>
+      <p:sp>
+        <p:nvSpPr>
+          <p:cNvPr id="4" name="Content Placeholder 3"/>
+          <p:cNvSpPr>
+            <a:spLocks noGrp="1"/>
+          </p:cNvSpPr>
+          <p:nvPr>
+            <p:ph idx="2" sz="half"/>
+          </p:nvPr>
+        </p:nvSpPr>
+        <p:spPr/>
+        <p:txBody>
+          <a:bodyPr/>
+          <a:lstStyle/>
+          <a:p>
+            <a:pPr lvl="0" indent="0" marL="0">
+              <a:buNone/>
+            </a:pPr>
+            <a:r>
+              <a:rPr b="1"/>
+              <a:t>The coding</a:t>
             </a:r>
           </a:p>
           <a:p>
             <a:pPr lvl="0"/>
             <a:r>
-              <a:rPr/>
-              <a:t>Asked: how fast and how often do these patterns evolve?</a:t>
-            </a:r>
-          </a:p>
-        </p:txBody>
-      </p:sp>
-      <p:sp>
-        <p:nvSpPr>
-          <p:cNvPr id="4" name="Content Placeholder 3"/>
-          <p:cNvSpPr>
-            <a:spLocks noGrp="1"/>
-          </p:cNvSpPr>
-          <p:nvPr>
-            <p:ph idx="2" sz="half"/>
-          </p:nvPr>
-        </p:nvSpPr>
-        <p:spPr/>
-        <p:txBody>
-          <a:bodyPr/>
-          <a:lstStyle/>
-          <a:p>
-            <a:pPr lvl="0" indent="0" marL="0">
-              <a:buNone/>
-            </a:pPr>
-            <a:r>
               <a:rPr b="1"/>
-              <a:t>Today: the Acanthuridae sub-dataset</a:t>
+              <a:t>30 motifs</a:t>
+            </a:r>
+            <a:r>
+              <a:rPr/>
+              <a:t> (stripes, spots, eyespots, marbling, beehive, saddle, …)</a:t>
             </a:r>
           </a:p>
           <a:p>
             <a:pPr lvl="0"/>
             <a:r>
+              <a:rPr/>
+              <a:t>× </a:t>
+            </a:r>
+            <a:r>
               <a:rPr b="1"/>
-              <a:t>65 surgeonfish species</a:t>
-            </a:r>
-            <a:r>
-              <a:rPr/>
-              <a:t> on a time-calibrated tree</a:t>
+              <a:t>3 body regions</a:t>
+            </a:r>
+            <a:r>
+              <a:rPr/>
+              <a:t> (head, trunk, tail)</a:t>
             </a:r>
           </a:p>
           <a:p>
             <a:pPr lvl="0"/>
             <a:r>
-              <a:rPr b="1"/>
-              <a:t>59 columns</a:t>
-            </a:r>
-            <a:r>
-              <a:rPr/>
-              <a:t> per species (57 motif characters + species name + row index)</a:t>
-            </a:r>
-          </a:p>
-          <a:p>
-            <a:pPr lvl="0"/>
-            <a:r>
-              <a:rPr/>
-              <a:t>You’ll test for </a:t>
-            </a:r>
-            <a:r>
-              <a:rPr b="1"/>
-              <a:t>phylogenetic signal</a:t>
-            </a:r>
-            <a:r>
-              <a:rPr/>
-              <a:t> on each character (and on a composite “pattern complexity” score)</a:t>
-            </a:r>
-          </a:p>
-          <a:p>
-            <a:pPr lvl="0" indent="0" marL="0">
-              <a:buNone/>
-            </a:pPr>
-            <a:r>
-              <a:rPr i="1"/>
-              <a:t>Their punchline: pigmentation patterns evolve rapidly and convergently — same motifs reappear repeatedly across distant lineages.</a:t>
+              <a:rPr/>
+              <a:t>= a per-species binary fingerprint</a:t>
             </a:r>
           </a:p>
         </p:txBody>
@@ -5752,12 +6362,12 @@
       </p:grpSpPr>
       <p:sp>
         <p:nvSpPr>
-          <p:cNvPr id="2" name="Title 1"/>
-          <p:cNvSpPr>
-            <a:spLocks noGrp="1"/>
-          </p:cNvSpPr>
-          <p:nvPr>
-            <p:ph type="title"/>
+          <p:cNvPr id="3" name="Content Placeholder 2"/>
+          <p:cNvSpPr>
+            <a:spLocks noGrp="1"/>
+          </p:cNvSpPr>
+          <p:nvPr>
+            <p:ph idx="1"/>
           </p:nvPr>
         </p:nvSpPr>
         <p:spPr/>
@@ -5770,169 +6380,15 @@
             </a:pPr>
             <a:r>
               <a:rPr/>
-              <a:t>How they coded color — body regions × motif vocabulary</a:t>
-            </a:r>
-          </a:p>
-        </p:txBody>
-      </p:sp>
-      <p:sp>
-        <p:nvSpPr>
-          <p:cNvPr id="3" name="Content Placeholder 2"/>
-          <p:cNvSpPr>
-            <a:spLocks noGrp="1"/>
-          </p:cNvSpPr>
-          <p:nvPr>
-            <p:ph idx="1" sz="half"/>
-          </p:nvPr>
-        </p:nvSpPr>
-        <p:spPr/>
-        <p:txBody>
-          <a:bodyPr/>
-          <a:lstStyle/>
-          <a:p>
-            <a:pPr lvl="0" indent="0" marL="0">
-              <a:buNone/>
-            </a:pPr>
-            <a:r>
-              <a:rPr/>
-              <a:t>         </a:t>
-            </a:r>
-          </a:p>
-          <a:p>
-            <a:pPr lvl="0" indent="0" marL="0">
-              <a:buNone/>
-            </a:pPr>
-          </a:p>
-          <a:p>
-            <a:pPr lvl="0" indent="0" marL="0">
-              <a:buNone/>
-            </a:pPr>
-            <a:r>
-              <a:rPr/>
-              <a:t> </a:t>
-            </a:r>
-          </a:p>
-          <a:p>
-            <a:pPr lvl="0" indent="0" marL="0">
-              <a:buNone/>
-            </a:pPr>
-          </a:p>
-          <a:p>
-            <a:pPr lvl="0" indent="0" marL="0">
-              <a:buNone/>
-            </a:pPr>
-          </a:p>
-          <a:p>
-            <a:pPr lvl="0" indent="0" marL="0">
-              <a:buNone/>
-            </a:pPr>
-            <a:r>
-              <a:rPr/>
-              <a:t> </a:t>
-            </a:r>
-          </a:p>
-          <a:p>
-            <a:pPr lvl="0" indent="0" marL="0">
-              <a:buNone/>
-            </a:pPr>
-            <a:r>
-              <a:rPr/>
-              <a:t>HEAD H_ (22 chars)</a:t>
-            </a:r>
-          </a:p>
-          <a:p>
-            <a:pPr lvl="0" indent="0" marL="0">
-              <a:buNone/>
-            </a:pPr>
-            <a:r>
-              <a:rPr/>
-              <a:t>TRUNK Tr_ (14 chars)</a:t>
-            </a:r>
-          </a:p>
-          <a:p>
-            <a:pPr lvl="0" indent="0" marL="0">
-              <a:buNone/>
-            </a:pPr>
-            <a:r>
-              <a:rPr/>
-              <a:t>TAIL Ta_ (17 chars)</a:t>
-            </a:r>
-          </a:p>
-          <a:p>
-            <a:pPr lvl="0" indent="0" marL="0">
-              <a:buNone/>
-            </a:pPr>
-            <a:r>
-              <a:rPr/>
-              <a:t> Every species is described by 57 binary characters spread across these three zones </a:t>
-            </a:r>
-          </a:p>
-        </p:txBody>
-      </p:sp>
-      <p:sp>
-        <p:nvSpPr>
-          <p:cNvPr id="4" name="Content Placeholder 3"/>
-          <p:cNvSpPr>
-            <a:spLocks noGrp="1"/>
-          </p:cNvSpPr>
-          <p:nvPr>
-            <p:ph idx="2" sz="half"/>
-          </p:nvPr>
-        </p:nvSpPr>
-        <p:spPr/>
-        <p:txBody>
-          <a:bodyPr/>
-          <a:lstStyle/>
-          <a:p>
-            <a:pPr lvl="0" indent="0" marL="0">
-              <a:buNone/>
-            </a:pPr>
+              <a:t>Today: the </a:t>
+            </a:r>
             <a:r>
               <a:rPr b="1"/>
-              <a:t>Motif vocabulary</a:t>
-            </a:r>
-            <a:r>
-              <a:rPr/>
-              <a:t> </a:t>
-            </a:r>
-            <a:r>
-              <a:rPr i="1"/>
-              <a:t>(scored in each zone)</a:t>
-            </a:r>
-          </a:p>
-          <a:p>
-            <a:pPr lvl="0" indent="0" marL="0">
-              <a:buNone/>
-            </a:pPr>
-            <a:r>
-              <a:rPr/>
-              <a:t>Coded as </a:t>
-            </a:r>
-            <a:r>
-              <a:rPr b="1"/>
-              <a:t>1 = present, 0 = absent</a:t>
-            </a:r>
-            <a:r>
-              <a:rPr/>
-              <a:t>, plus “1 vs 2+” splits for stripes/stains/points (e.g., </a:t>
-            </a:r>
-            <a:r>
-              <a:rPr>
-                <a:latin typeface="Courier"/>
-              </a:rPr>
-              <a:t>H_2_h_strips_+</a:t>
-            </a:r>
-            <a:r>
-              <a:rPr/>
-              <a:t> means </a:t>
-            </a:r>
-            <a:r>
-              <a:rPr i="1"/>
-              <a:t>2 or more</a:t>
-            </a:r>
-            <a:r>
-              <a:rPr/>
-              <a:t> horizontal stripes on the head).</a:t>
+              <a:t>Acanthuridae</a:t>
+            </a:r>
+            <a:r>
+              <a:rPr/>
+              <a:t> sub-dataset → 83 species × 57 columns (the 30 motifs expand to 57 binary columns with “1 vs 2+” splits, eye-overlap variants, and 5 whole-body indices).</a:t>
             </a:r>
           </a:p>
         </p:txBody>
@@ -5979,7 +6435,182 @@
             </a:pPr>
             <a:r>
               <a:rPr/>
-              <a:t>How to read a coded species — three worked examples</a:t>
+              <a:t>How they coded color — body regions × motifs</a:t>
+            </a:r>
+          </a:p>
+        </p:txBody>
+      </p:sp>
+      <p:sp>
+        <p:nvSpPr>
+          <p:cNvPr id="3" name="Content Placeholder 2"/>
+          <p:cNvSpPr>
+            <a:spLocks noGrp="1"/>
+          </p:cNvSpPr>
+          <p:nvPr>
+            <p:ph idx="1" sz="half"/>
+          </p:nvPr>
+        </p:nvSpPr>
+        <p:spPr/>
+        <p:txBody>
+          <a:bodyPr/>
+          <a:lstStyle/>
+          <a:p>
+            <a:pPr lvl="0" indent="0" marL="0">
+              <a:buNone/>
+            </a:pPr>
+            <a:r>
+              <a:rPr/>
+              <a:t>         </a:t>
+            </a:r>
+          </a:p>
+          <a:p>
+            <a:pPr lvl="0" indent="0" marL="0">
+              <a:buNone/>
+            </a:pPr>
+            <a:r>
+              <a:rPr/>
+              <a:t>      </a:t>
+            </a:r>
+          </a:p>
+          <a:p>
+            <a:pPr lvl="0" indent="0" marL="0">
+              <a:buNone/>
+            </a:pPr>
+            <a:r>
+              <a:rPr/>
+              <a:t>HEAD 22 chars TRUNK 14 chars TAIL 17 chars</a:t>
+            </a:r>
+          </a:p>
+          <a:p>
+            <a:pPr lvl="0" indent="0" marL="0">
+              <a:buNone/>
+            </a:pPr>
+            <a:r>
+              <a:rPr/>
+              <a:t> Every species = a row of 57 binary characters across these three zones </a:t>
+            </a:r>
+          </a:p>
+        </p:txBody>
+      </p:sp>
+      <p:sp>
+        <p:nvSpPr>
+          <p:cNvPr id="4" name="Content Placeholder 3"/>
+          <p:cNvSpPr>
+            <a:spLocks noGrp="1"/>
+          </p:cNvSpPr>
+          <p:nvPr>
+            <p:ph idx="2" sz="half"/>
+          </p:nvPr>
+        </p:nvSpPr>
+        <p:spPr/>
+        <p:txBody>
+          <a:bodyPr/>
+          <a:lstStyle/>
+          <a:p>
+            <a:pPr lvl="0" indent="0" marL="0">
+              <a:buNone/>
+            </a:pPr>
+            <a:r>
+              <a:rPr b="1"/>
+              <a:t>Motif vocabulary</a:t>
+            </a:r>
+            <a:r>
+              <a:rPr/>
+              <a:t> </a:t>
+            </a:r>
+            <a:r>
+              <a:rPr i="1"/>
+              <a:t>(scored in each region)</a:t>
+            </a:r>
+          </a:p>
+          <a:p>
+            <a:pPr lvl="0" indent="0" marL="0">
+              <a:buNone/>
+            </a:pPr>
+            <a:r>
+              <a:rPr/>
+              <a:t>Each scored as </a:t>
+            </a:r>
+            <a:r>
+              <a:rPr b="1"/>
+              <a:t>1 = present, 0 = absent</a:t>
+            </a:r>
+            <a:r>
+              <a:rPr/>
+              <a:t>, with extra splits for </a:t>
+            </a:r>
+            <a:r>
+              <a:rPr b="1"/>
+              <a:t>1 vs 2+</a:t>
+            </a:r>
+            <a:r>
+              <a:rPr/>
+              <a:t> occurrences (e.g., </a:t>
+            </a:r>
+            <a:r>
+              <a:rPr>
+                <a:latin typeface="Courier"/>
+              </a:rPr>
+              <a:t>H_2_h_strips_+</a:t>
+            </a:r>
+            <a:r>
+              <a:rPr/>
+              <a:t> means </a:t>
+            </a:r>
+            <a:r>
+              <a:rPr i="1"/>
+              <a:t>2 or more</a:t>
+            </a:r>
+            <a:r>
+              <a:rPr/>
+              <a:t> horizontal stripes on the head).</a:t>
+            </a:r>
+          </a:p>
+        </p:txBody>
+      </p:sp>
+    </p:spTree>
+  </p:cSld>
+</p:sld>
+</file>
+
+<file path=ppt/slides/slide8.xml><?xml version="1.0" encoding="utf-8"?>
+<p:sld xmlns:a="http://schemas.openxmlformats.org/drawingml/2006/main" xmlns:r="http://schemas.openxmlformats.org/officeDocument/2006/relationships" xmlns:p="http://schemas.openxmlformats.org/presentationml/2006/main">
+  <p:cSld>
+    <p:spTree>
+      <p:nvGrpSpPr>
+        <p:cNvPr id="1" name=""/>
+        <p:cNvGrpSpPr/>
+        <p:nvPr/>
+      </p:nvGrpSpPr>
+      <p:grpSpPr>
+        <a:xfrm>
+          <a:off x="0" y="0"/>
+          <a:ext cx="0" cy="0"/>
+          <a:chOff x="0" y="0"/>
+          <a:chExt cx="0" cy="0"/>
+        </a:xfrm>
+      </p:grpSpPr>
+      <p:sp>
+        <p:nvSpPr>
+          <p:cNvPr id="2" name="Title 1"/>
+          <p:cNvSpPr>
+            <a:spLocks noGrp="1"/>
+          </p:cNvSpPr>
+          <p:nvPr>
+            <p:ph type="title"/>
+          </p:nvPr>
+        </p:nvSpPr>
+        <p:spPr/>
+        <p:txBody>
+          <a:bodyPr/>
+          <a:lstStyle/>
+          <a:p>
+            <a:pPr lvl="0" indent="0" marL="0">
+              <a:buNone/>
+            </a:pPr>
+            <a:r>
+              <a:rPr/>
+              <a:t>Three species, coded — the intuition</a:t>
             </a:r>
           </a:p>
         </p:txBody>
@@ -6049,67 +6680,6 @@
 </p:sld>
 </file>
 
-<file path=ppt/slides/slide8.xml><?xml version="1.0" encoding="utf-8"?>
-<p:sld xmlns:a="http://schemas.openxmlformats.org/drawingml/2006/main" xmlns:r="http://schemas.openxmlformats.org/officeDocument/2006/relationships" xmlns:p="http://schemas.openxmlformats.org/presentationml/2006/main">
-  <p:cSld>
-    <p:spTree>
-      <p:nvGrpSpPr>
-        <p:cNvPr id="1" name=""/>
-        <p:cNvGrpSpPr/>
-        <p:nvPr/>
-      </p:nvGrpSpPr>
-      <p:grpSpPr>
-        <a:xfrm>
-          <a:off x="0" y="0"/>
-          <a:ext cx="0" cy="0"/>
-          <a:chOff x="0" y="0"/>
-          <a:chExt cx="0" cy="0"/>
-        </a:xfrm>
-      </p:grpSpPr>
-      <p:sp>
-        <p:nvSpPr>
-          <p:cNvPr id="3" name="Content Placeholder 2"/>
-          <p:cNvSpPr>
-            <a:spLocks noGrp="1"/>
-          </p:cNvSpPr>
-          <p:nvPr>
-            <p:ph idx="1"/>
-          </p:nvPr>
-        </p:nvSpPr>
-        <p:spPr/>
-        <p:txBody>
-          <a:bodyPr/>
-          <a:lstStyle/>
-          <a:p>
-            <a:pPr lvl="0" indent="0" marL="0">
-              <a:buNone/>
-            </a:pPr>
-            <a:r>
-              <a:rPr b="1"/>
-              <a:t>Pattern complexity = </a:t>
-            </a:r>
-            <a:r>
-              <a:rPr b="1">
-                <a:latin typeface="Courier"/>
-              </a:rPr>
-              <a:t>rowSums(motifs)</a:t>
-            </a:r>
-            <a:r>
-              <a:rPr b="1"/>
-              <a:t> per species</a:t>
-            </a:r>
-            <a:r>
-              <a:rPr/>
-              <a:t> — the headline number you’ll map onto the tree today.</a:t>
-            </a:r>
-          </a:p>
-        </p:txBody>
-      </p:sp>
-    </p:spTree>
-  </p:cSld>
-</p:sld>
-</file>
-
 <file path=ppt/slides/slide9.xml><?xml version="1.0" encoding="utf-8"?>
 <p:sld xmlns:a="http://schemas.openxmlformats.org/drawingml/2006/main" xmlns:r="http://schemas.openxmlformats.org/officeDocument/2006/relationships" xmlns:p="http://schemas.openxmlformats.org/presentationml/2006/main">
   <p:cSld>
@@ -6129,12 +6699,12 @@
       </p:grpSpPr>
       <p:sp>
         <p:nvSpPr>
-          <p:cNvPr id="2" name="Title 1"/>
-          <p:cNvSpPr>
-            <a:spLocks noGrp="1"/>
-          </p:cNvSpPr>
-          <p:nvPr>
-            <p:ph type="title"/>
+          <p:cNvPr id="3" name="Content Placeholder 2"/>
+          <p:cNvSpPr>
+            <a:spLocks noGrp="1"/>
+          </p:cNvSpPr>
+          <p:nvPr>
+            <p:ph idx="1"/>
           </p:nvPr>
         </p:nvSpPr>
         <p:spPr/>
@@ -6147,40 +6717,25 @@
             </a:pPr>
             <a:r>
               <a:rPr/>
-              <a:t>What is phylogenetic signal?</a:t>
-            </a:r>
-          </a:p>
-        </p:txBody>
-      </p:sp>
-      <p:sp>
-        <p:nvSpPr>
-          <p:cNvPr id="3" name="Content Placeholder 2"/>
-          <p:cNvSpPr>
-            <a:spLocks noGrp="1"/>
-          </p:cNvSpPr>
-          <p:nvPr>
-            <p:ph idx="1"/>
-          </p:nvPr>
-        </p:nvSpPr>
-        <p:spPr/>
-        <p:txBody>
-          <a:bodyPr/>
-          <a:lstStyle/>
-          <a:p>
-            <a:pPr lvl="0" indent="0" marL="0">
-              <a:buNone/>
-            </a:pPr>
-            <a:r>
-              <a:rPr/>
-              <a:t>The tendency for </a:t>
+              <a:t>The </a:t>
             </a:r>
             <a:r>
               <a:rPr b="1"/>
-              <a:t>closely related species to resemble each other</a:t>
-            </a:r>
-            <a:r>
-              <a:rPr/>
-              <a:t> more than distantly related species.</a:t>
+              <a:t>pattern complexity</a:t>
+            </a:r>
+            <a:r>
+              <a:rPr/>
+              <a:t> score is just </a:t>
+            </a:r>
+            <a:r>
+              <a:rPr>
+                <a:latin typeface="Courier"/>
+              </a:rPr>
+              <a:t>rowSums(motifs)</a:t>
+            </a:r>
+            <a:r>
+              <a:rPr/>
+              <a:t> — the headline number you’ll map onto the tree today.</a:t>
             </a:r>
           </a:p>
         </p:txBody>
